--- a/Manual/UsersGuide.pptx
+++ b/Manual/UsersGuide.pptx
@@ -16,22 +16,29 @@
     <p:sldId id="284" r:id="rId10"/>
     <p:sldId id="264" r:id="rId11"/>
     <p:sldId id="265" r:id="rId12"/>
-    <p:sldId id="266" r:id="rId13"/>
-    <p:sldId id="273" r:id="rId14"/>
-    <p:sldId id="276" r:id="rId15"/>
-    <p:sldId id="270" r:id="rId16"/>
-    <p:sldId id="274" r:id="rId17"/>
-    <p:sldId id="268" r:id="rId18"/>
-    <p:sldId id="271" r:id="rId19"/>
-    <p:sldId id="272" r:id="rId20"/>
-    <p:sldId id="285" r:id="rId21"/>
-    <p:sldId id="282" r:id="rId22"/>
-    <p:sldId id="281" r:id="rId23"/>
-    <p:sldId id="286" r:id="rId24"/>
-    <p:sldId id="278" r:id="rId25"/>
-    <p:sldId id="277" r:id="rId26"/>
-    <p:sldId id="279" r:id="rId27"/>
-    <p:sldId id="280" r:id="rId28"/>
+    <p:sldId id="287" r:id="rId13"/>
+    <p:sldId id="288" r:id="rId14"/>
+    <p:sldId id="289" r:id="rId15"/>
+    <p:sldId id="290" r:id="rId16"/>
+    <p:sldId id="291" r:id="rId17"/>
+    <p:sldId id="292" r:id="rId18"/>
+    <p:sldId id="270" r:id="rId19"/>
+    <p:sldId id="266" r:id="rId20"/>
+    <p:sldId id="273" r:id="rId21"/>
+    <p:sldId id="276" r:id="rId22"/>
+    <p:sldId id="274" r:id="rId23"/>
+    <p:sldId id="268" r:id="rId24"/>
+    <p:sldId id="271" r:id="rId25"/>
+    <p:sldId id="293" r:id="rId26"/>
+    <p:sldId id="272" r:id="rId27"/>
+    <p:sldId id="285" r:id="rId28"/>
+    <p:sldId id="282" r:id="rId29"/>
+    <p:sldId id="281" r:id="rId30"/>
+    <p:sldId id="286" r:id="rId31"/>
+    <p:sldId id="278" r:id="rId32"/>
+    <p:sldId id="277" r:id="rId33"/>
+    <p:sldId id="279" r:id="rId34"/>
+    <p:sldId id="280" r:id="rId35"/>
   </p:sldIdLst>
   <p:sldSz cx="9906000" cy="6858000" type="A4"/>
   <p:notesSz cx="6858000" cy="9144000"/>
@@ -1385,7 +1392,7 @@
           <p:cNvPr id="2" name="タイトル 1">
             <a:extLst>
               <a:ext uri="{FF2B5EF4-FFF2-40B4-BE49-F238E27FC236}">
-                <a16:creationId xmlns:a16="http://schemas.microsoft.com/office/drawing/2014/main" id="{15D0E301-D6B1-2149-3E4F-0251CD0EBBF5}"/>
+                <a16:creationId xmlns:a16="http://schemas.microsoft.com/office/drawing/2014/main" id="{C05A2B4C-3E52-9360-23E1-9647F211F2EA}"/>
               </a:ext>
             </a:extLst>
           </p:cNvPr>
@@ -1401,234 +1408,177 @@
           <a:bodyPr/>
           <a:lstStyle/>
           <a:p>
-            <a:r>
-              <a:rPr lang="en-US" altLang="ja-JP" dirty="0"/>
-              <a:t>CRM(Customer Relation Management)</a:t>
-            </a:r>
-            <a:r>
-              <a:rPr kumimoji="1" lang="en-US" altLang="ja-JP" dirty="0"/>
-              <a:t>	</a:t>
-            </a:r>
-            <a:endParaRPr kumimoji="1" lang="ja-JP" altLang="en-US" dirty="0"/>
-          </a:p>
-        </p:txBody>
-      </p:sp>
-      <p:sp>
-        <p:nvSpPr>
-          <p:cNvPr id="3" name="コンテンツ プレースホルダー 2">
-            <a:extLst>
-              <a:ext uri="{FF2B5EF4-FFF2-40B4-BE49-F238E27FC236}">
-                <a16:creationId xmlns:a16="http://schemas.microsoft.com/office/drawing/2014/main" id="{3AD05A2C-0B51-4FBD-1892-3806B1807CD6}"/>
-              </a:ext>
-            </a:extLst>
-          </p:cNvPr>
-          <p:cNvSpPr>
-            <a:spLocks noGrp="1"/>
-          </p:cNvSpPr>
-          <p:nvPr>
-            <p:ph idx="1"/>
-          </p:nvPr>
-        </p:nvSpPr>
-        <p:spPr/>
-        <p:txBody>
-          <a:bodyPr/>
-          <a:lstStyle/>
-          <a:p>
-            <a:r>
-              <a:rPr kumimoji="1" lang="ja-JP" altLang="en-US" dirty="0"/>
-              <a:t>本システムは</a:t>
-            </a:r>
-            <a:r>
-              <a:rPr kumimoji="1" lang="en-US" altLang="ja-JP" dirty="0"/>
-              <a:t>CRM</a:t>
-            </a:r>
+            <a:pPr lvl="0"/>
             <a:r>
               <a:rPr lang="ja-JP" altLang="en-US" dirty="0"/>
-              <a:t>機能を有しており、</a:t>
-            </a:r>
-            <a:r>
-              <a:rPr kumimoji="1" lang="ja-JP" altLang="en-US" dirty="0"/>
-              <a:t>、</a:t>
-            </a:r>
-            <a:r>
-              <a:rPr kumimoji="1" lang="en-US" altLang="ja-JP" dirty="0"/>
-              <a:t>Web</a:t>
-            </a:r>
-            <a:r>
-              <a:rPr kumimoji="1" lang="ja-JP" altLang="en-US" dirty="0"/>
-              <a:t>フォームから寄せられた依頼に始まり、診療が終了する有効期間が過ぎた後、次回</a:t>
-            </a:r>
-            <a:r>
-              <a:rPr lang="ja-JP" altLang="en-US" dirty="0"/>
-              <a:t>同一患者からの</a:t>
-            </a:r>
-            <a:r>
-              <a:rPr kumimoji="1" lang="ja-JP" altLang="en-US" dirty="0"/>
-              <a:t>予約があったときの対応方法</a:t>
-            </a:r>
-            <a:r>
-              <a:rPr lang="ja-JP" altLang="en-US" dirty="0"/>
-              <a:t>の参考とするために</a:t>
-            </a:r>
-            <a:r>
-              <a:rPr kumimoji="1" lang="ja-JP" altLang="en-US" dirty="0"/>
-              <a:t>、スタッフが特定の管理状況に遷移したときに</a:t>
-            </a:r>
-            <a:r>
-              <a:rPr lang="ja-JP" altLang="en-US" dirty="0"/>
-              <a:t>チェックボックス、メモからなるダイアログが現れて</a:t>
-            </a:r>
-            <a:r>
-              <a:rPr kumimoji="1" lang="ja-JP" altLang="en-US" dirty="0"/>
-              <a:t>患者の特徴を残すことができるようになっています。</a:t>
-            </a:r>
-            <a:endParaRPr kumimoji="1" lang="en-US" altLang="ja-JP" dirty="0"/>
-          </a:p>
-          <a:p>
-            <a:r>
-              <a:rPr lang="ja-JP" altLang="en-US" dirty="0"/>
-              <a:t>特に電話対応があった場合には、会話を通じてより相手の特徴が把握できるので、今後の対応時に有用な情報があれば残すようにしましょう。</a:t>
+              <a:t>予約</a:t>
+            </a:r>
+            <a:r>
+              <a:rPr lang="ja-JP" altLang="ja-JP" dirty="0"/>
+              <a:t>チケットの一生（ライフサイクル） </a:t>
             </a:r>
             <a:endParaRPr lang="en-US" altLang="ja-JP" dirty="0"/>
           </a:p>
-          <a:p>
-            <a:r>
-              <a:rPr kumimoji="1" lang="ja-JP" altLang="en-US" dirty="0"/>
-              <a:t>本</a:t>
-            </a:r>
-            <a:r>
-              <a:rPr kumimoji="1" lang="en-US" altLang="ja-JP" dirty="0"/>
-              <a:t>Web</a:t>
-            </a:r>
-            <a:r>
-              <a:rPr kumimoji="1" lang="ja-JP" altLang="en-US" dirty="0"/>
-              <a:t>フォームを</a:t>
-            </a:r>
-            <a:r>
-              <a:rPr kumimoji="1" lang="en-US" altLang="ja-JP" dirty="0"/>
-              <a:t>1</a:t>
-            </a:r>
-            <a:r>
-              <a:rPr kumimoji="1" lang="ja-JP" altLang="en-US" dirty="0"/>
-              <a:t>回以上利用した患者であれば、次回、</a:t>
-            </a:r>
-            <a:r>
-              <a:rPr kumimoji="1" lang="en-US" altLang="ja-JP" dirty="0"/>
-              <a:t>Web</a:t>
-            </a:r>
-            <a:r>
-              <a:rPr kumimoji="1" lang="ja-JP" altLang="en-US" dirty="0"/>
-              <a:t>フォーム上で、カルテ</a:t>
-            </a:r>
-            <a:r>
-              <a:rPr lang="en-US" altLang="ja-JP" dirty="0"/>
-              <a:t>No</a:t>
-            </a:r>
-            <a:r>
-              <a:rPr lang="ja-JP" altLang="en-US" dirty="0"/>
-              <a:t>と誕生日の照合を経て患者の住所や氏名などの情報の</a:t>
-            </a:r>
-            <a:r>
-              <a:rPr kumimoji="1" lang="ja-JP" altLang="en-US" dirty="0"/>
-              <a:t>自動入力アシストが働くため、次回以降は患者の入力の手間が軽減されます。</a:t>
-            </a:r>
-            <a:endParaRPr kumimoji="1" lang="en-US" altLang="ja-JP" dirty="0"/>
-          </a:p>
-          <a:p>
-            <a:r>
-              <a:rPr lang="ja-JP" altLang="en-US" dirty="0"/>
-              <a:t>ご注意：</a:t>
-            </a:r>
-            <a:r>
-              <a:rPr kumimoji="1" lang="ja-JP" altLang="en-US" dirty="0"/>
-              <a:t>本</a:t>
-            </a:r>
-            <a:r>
-              <a:rPr kumimoji="1" lang="en-US" altLang="ja-JP" dirty="0"/>
-              <a:t>CRM</a:t>
-            </a:r>
-            <a:r>
-              <a:rPr kumimoji="1" lang="ja-JP" altLang="en-US" dirty="0"/>
-              <a:t>は</a:t>
-            </a:r>
-            <a:r>
-              <a:rPr kumimoji="1" lang="en-US" altLang="ja-JP" dirty="0"/>
-              <a:t>Web</a:t>
-            </a:r>
-            <a:r>
-              <a:rPr kumimoji="1" lang="ja-JP" altLang="en-US" dirty="0"/>
-              <a:t>フォームを使わない従来の電話依頼による予約処理や、診療現場で医師が患者と会話で次回の予約を入れた場合などは</a:t>
-            </a:r>
-            <a:r>
-              <a:rPr lang="ja-JP" altLang="en-US" dirty="0"/>
-              <a:t>対象外となります。</a:t>
-            </a:r>
-            <a:endParaRPr kumimoji="1" lang="en-US" altLang="ja-JP" dirty="0"/>
-          </a:p>
-          <a:p>
-            <a:pPr marL="0" indent="0">
-              <a:buNone/>
-            </a:pPr>
-            <a:r>
-              <a:rPr kumimoji="1" lang="ja-JP" altLang="en-US" dirty="0"/>
-              <a:t>　</a:t>
-            </a:r>
-            <a:r>
-              <a:rPr kumimoji="1" lang="en-US" altLang="ja-JP" dirty="0"/>
-              <a:t>※</a:t>
-            </a:r>
-            <a:r>
-              <a:rPr kumimoji="1" lang="ja-JP" altLang="en-US" dirty="0"/>
-              <a:t>従来の電話依頼による予約で、スタッフ自らが患者情報データを</a:t>
-            </a:r>
-            <a:r>
-              <a:rPr kumimoji="1" lang="en-US" altLang="ja-JP" dirty="0"/>
-              <a:t>CRM</a:t>
-            </a:r>
-            <a:r>
-              <a:rPr kumimoji="1" lang="ja-JP" altLang="en-US" dirty="0"/>
-              <a:t>に手動で登録する方法になったしても、この</a:t>
-            </a:r>
-            <a:r>
-              <a:rPr kumimoji="1" lang="en-US" altLang="ja-JP" dirty="0"/>
-              <a:t>CRM</a:t>
-            </a:r>
-            <a:r>
-              <a:rPr kumimoji="1" lang="ja-JP" altLang="en-US" dirty="0"/>
-              <a:t>運用をしたい場合は別途ご相談ください。</a:t>
-            </a:r>
-            <a:endParaRPr kumimoji="1" lang="en-US" altLang="ja-JP" dirty="0"/>
-          </a:p>
-          <a:p>
-            <a:pPr marL="0" indent="0">
-              <a:buNone/>
-            </a:pPr>
-            <a:endParaRPr lang="en-US" altLang="ja-JP" dirty="0"/>
-          </a:p>
-          <a:p>
-            <a:pPr marL="0" indent="0">
-              <a:buNone/>
-            </a:pPr>
-            <a:endParaRPr kumimoji="1" lang="en-US" altLang="ja-JP" dirty="0"/>
-          </a:p>
-          <a:p>
-            <a:endParaRPr kumimoji="1" lang="en-US" altLang="ja-JP" dirty="0"/>
-          </a:p>
-          <a:p>
-            <a:endParaRPr kumimoji="1" lang="en-US" altLang="ja-JP" dirty="0"/>
-          </a:p>
-          <a:p>
-            <a:endParaRPr kumimoji="1" lang="en-US" altLang="ja-JP" dirty="0"/>
-          </a:p>
-          <a:p>
-            <a:endParaRPr kumimoji="1" lang="ja-JP" altLang="en-US" dirty="0"/>
+        </p:txBody>
+      </p:sp>
+      <p:pic>
+        <p:nvPicPr>
+          <p:cNvPr id="11" name="図 10">
+            <a:extLst>
+              <a:ext uri="{FF2B5EF4-FFF2-40B4-BE49-F238E27FC236}">
+                <a16:creationId xmlns:a16="http://schemas.microsoft.com/office/drawing/2014/main" id="{39DB4E7A-9F7A-92D4-D01D-A3D533A4E0CB}"/>
+              </a:ext>
+            </a:extLst>
+          </p:cNvPr>
+          <p:cNvPicPr>
+            <a:picLocks noChangeAspect="1"/>
+          </p:cNvPicPr>
+          <p:nvPr/>
+        </p:nvPicPr>
+        <p:blipFill>
+          <a:blip r:embed="rId2"/>
+          <a:stretch>
+            <a:fillRect/>
+          </a:stretch>
+        </p:blipFill>
+        <p:spPr>
+          <a:xfrm>
+            <a:off x="280878" y="847727"/>
+            <a:ext cx="6142209" cy="5707076"/>
+          </a:xfrm>
+          <a:prstGeom prst="rect">
+            <a:avLst/>
+          </a:prstGeom>
+        </p:spPr>
+      </p:pic>
+      <p:sp>
+        <p:nvSpPr>
+          <p:cNvPr id="12" name="テキスト ボックス 11">
+            <a:extLst>
+              <a:ext uri="{FF2B5EF4-FFF2-40B4-BE49-F238E27FC236}">
+                <a16:creationId xmlns:a16="http://schemas.microsoft.com/office/drawing/2014/main" id="{A0AAEFAB-4679-7B71-8AF7-5C20EB5E37AF}"/>
+              </a:ext>
+            </a:extLst>
+          </p:cNvPr>
+          <p:cNvSpPr txBox="1"/>
+          <p:nvPr/>
+        </p:nvSpPr>
+        <p:spPr>
+          <a:xfrm>
+            <a:off x="6579417" y="847727"/>
+            <a:ext cx="3100738" cy="3970318"/>
+          </a:xfrm>
+          <a:prstGeom prst="rect">
+            <a:avLst/>
+          </a:prstGeom>
+          <a:solidFill>
+            <a:schemeClr val="accent6">
+              <a:lumMod val="20000"/>
+              <a:lumOff val="80000"/>
+            </a:schemeClr>
+          </a:solidFill>
+          <a:ln>
+            <a:solidFill>
+              <a:schemeClr val="bg2">
+                <a:lumMod val="90000"/>
+              </a:schemeClr>
+            </a:solidFill>
+          </a:ln>
+        </p:spPr>
+        <p:txBody>
+          <a:bodyPr wrap="square" rtlCol="0">
+            <a:spAutoFit/>
+          </a:bodyPr>
+          <a:lstStyle/>
+          <a:p>
+            <a:pPr lvl="0"/>
+            <a:r>
+              <a:rPr lang="ja-JP" altLang="ja-JP" sz="1400" dirty="0">
+                <a:latin typeface="メイリオ" panose="020B0604030504040204" pitchFamily="50" charset="-128"/>
+                <a:ea typeface="メイリオ" panose="020B0604030504040204" pitchFamily="50" charset="-128"/>
+              </a:rPr>
+              <a:t>予約チケットの処理は、大きく分けて5つの機能ブロックで構成されています。</a:t>
+            </a:r>
+            <a:endParaRPr lang="en-US" altLang="ja-JP" sz="1400" dirty="0">
+              <a:latin typeface="メイリオ" panose="020B0604030504040204" pitchFamily="50" charset="-128"/>
+              <a:ea typeface="メイリオ" panose="020B0604030504040204" pitchFamily="50" charset="-128"/>
+            </a:endParaRPr>
+          </a:p>
+          <a:p>
+            <a:pPr lvl="0"/>
+            <a:endParaRPr lang="ja-JP" altLang="ja-JP" sz="1400" dirty="0">
+              <a:latin typeface="メイリオ" panose="020B0604030504040204" pitchFamily="50" charset="-128"/>
+              <a:ea typeface="メイリオ" panose="020B0604030504040204" pitchFamily="50" charset="-128"/>
+            </a:endParaRPr>
+          </a:p>
+          <a:p>
+            <a:pPr lvl="0"/>
+            <a:r>
+              <a:rPr lang="ja-JP" altLang="ja-JP" sz="1400" b="1" dirty="0">
+                <a:latin typeface="メイリオ" panose="020B0604030504040204" pitchFamily="50" charset="-128"/>
+                <a:ea typeface="メイリオ" panose="020B0604030504040204" pitchFamily="50" charset="-128"/>
+              </a:rPr>
+              <a:t>開始から完了までの基本ルート</a:t>
+            </a:r>
+            <a:endParaRPr lang="en-US" altLang="ja-JP" sz="1400" b="1" dirty="0">
+              <a:latin typeface="メイリオ" panose="020B0604030504040204" pitchFamily="50" charset="-128"/>
+              <a:ea typeface="メイリオ" panose="020B0604030504040204" pitchFamily="50" charset="-128"/>
+            </a:endParaRPr>
+          </a:p>
+          <a:p>
+            <a:pPr lvl="0"/>
+            <a:r>
+              <a:rPr lang="ja-JP" altLang="ja-JP" sz="1400" dirty="0">
+                <a:latin typeface="メイリオ" panose="020B0604030504040204" pitchFamily="50" charset="-128"/>
+                <a:ea typeface="メイリオ" panose="020B0604030504040204" pitchFamily="50" charset="-128"/>
+              </a:rPr>
+              <a:t> 全てのチケットは【受付・初期設定】から始まり、患者への連絡方法に応じて【電話対応】または【メール対応】のルートに分岐します。最終的には受診日を迎え、【完了・評価】にてクローズされます。</a:t>
+            </a:r>
+          </a:p>
+          <a:p>
+            <a:pPr lvl="0"/>
+            <a:endParaRPr lang="en-US" altLang="ja-JP" sz="1400" b="1" dirty="0">
+              <a:latin typeface="メイリオ" panose="020B0604030504040204" pitchFamily="50" charset="-128"/>
+              <a:ea typeface="メイリオ" panose="020B0604030504040204" pitchFamily="50" charset="-128"/>
+            </a:endParaRPr>
+          </a:p>
+          <a:p>
+            <a:pPr lvl="0"/>
+            <a:r>
+              <a:rPr lang="ja-JP" altLang="ja-JP" sz="1400" b="1" dirty="0">
+                <a:latin typeface="メイリオ" panose="020B0604030504040204" pitchFamily="50" charset="-128"/>
+                <a:ea typeface="メイリオ" panose="020B0604030504040204" pitchFamily="50" charset="-128"/>
+              </a:rPr>
+              <a:t>中断と復活</a:t>
+            </a:r>
+            <a:r>
+              <a:rPr lang="ja-JP" altLang="ja-JP" sz="1400" dirty="0">
+                <a:latin typeface="メイリオ" panose="020B0604030504040204" pitchFamily="50" charset="-128"/>
+                <a:ea typeface="メイリオ" panose="020B0604030504040204" pitchFamily="50" charset="-128"/>
+              </a:rPr>
+              <a:t> </a:t>
+            </a:r>
+            <a:endParaRPr lang="en-US" altLang="ja-JP" sz="1400" dirty="0">
+              <a:latin typeface="メイリオ" panose="020B0604030504040204" pitchFamily="50" charset="-128"/>
+              <a:ea typeface="メイリオ" panose="020B0604030504040204" pitchFamily="50" charset="-128"/>
+            </a:endParaRPr>
+          </a:p>
+          <a:p>
+            <a:pPr lvl="0"/>
+            <a:r>
+              <a:rPr lang="ja-JP" altLang="ja-JP" sz="1400" dirty="0">
+                <a:latin typeface="メイリオ" panose="020B0604030504040204" pitchFamily="50" charset="-128"/>
+                <a:ea typeface="メイリオ" panose="020B0604030504040204" pitchFamily="50" charset="-128"/>
+              </a:rPr>
+              <a:t>途中でキャンセルや強制終了が発生した場合は【各種中断処理】へ移行してクローズされますが、手動キャンセルの場合は再び【受付・初期設定】へ復活させることが可能です。</a:t>
+            </a:r>
           </a:p>
         </p:txBody>
       </p:sp>
     </p:spTree>
     <p:extLst>
       <p:ext uri="{BB962C8B-B14F-4D97-AF65-F5344CB8AC3E}">
-        <p14:creationId xmlns:p14="http://schemas.microsoft.com/office/powerpoint/2010/main" val="3472873037"/>
+        <p14:creationId xmlns:p14="http://schemas.microsoft.com/office/powerpoint/2010/main" val="880885838"/>
       </p:ext>
     </p:extLst>
   </p:cSld>
@@ -1660,7 +1610,7 @@
           <p:cNvPr id="2" name="タイトル 1">
             <a:extLst>
               <a:ext uri="{FF2B5EF4-FFF2-40B4-BE49-F238E27FC236}">
-                <a16:creationId xmlns:a16="http://schemas.microsoft.com/office/drawing/2014/main" id="{1F245752-9231-6699-CD79-DD3CC7B72A67}"/>
+                <a16:creationId xmlns:a16="http://schemas.microsoft.com/office/drawing/2014/main" id="{64B61217-31FD-1E66-6551-FCBFA6AA9A30}"/>
               </a:ext>
             </a:extLst>
           </p:cNvPr>
@@ -1677,224 +1627,185 @@
           <a:lstStyle/>
           <a:p>
             <a:r>
-              <a:rPr kumimoji="1" lang="ja-JP" altLang="en-US" dirty="0"/>
-              <a:t>メールを使った予約日時の確定合意処理について</a:t>
-            </a:r>
-          </a:p>
-        </p:txBody>
-      </p:sp>
-      <p:sp>
-        <p:nvSpPr>
-          <p:cNvPr id="3" name="コンテンツ プレースホルダー 2">
-            <a:extLst>
-              <a:ext uri="{FF2B5EF4-FFF2-40B4-BE49-F238E27FC236}">
-                <a16:creationId xmlns:a16="http://schemas.microsoft.com/office/drawing/2014/main" id="{B781AB5F-69C5-62A7-B237-23E08228A758}"/>
-              </a:ext>
-            </a:extLst>
-          </p:cNvPr>
-          <p:cNvSpPr>
-            <a:spLocks noGrp="1"/>
-          </p:cNvSpPr>
-          <p:nvPr>
-            <p:ph idx="1"/>
-          </p:nvPr>
-        </p:nvSpPr>
-        <p:spPr/>
-        <p:txBody>
-          <a:bodyPr>
-            <a:normAutofit/>
+              <a:rPr lang="ja-JP" altLang="ja-JP" dirty="0"/>
+              <a:t>【受付・初期設定】ブロック</a:t>
+            </a:r>
+            <a:endParaRPr kumimoji="1" lang="ja-JP" altLang="en-US" dirty="0"/>
+          </a:p>
+        </p:txBody>
+      </p:sp>
+      <p:pic>
+        <p:nvPicPr>
+          <p:cNvPr id="9" name="図 8">
+            <a:extLst>
+              <a:ext uri="{FF2B5EF4-FFF2-40B4-BE49-F238E27FC236}">
+                <a16:creationId xmlns:a16="http://schemas.microsoft.com/office/drawing/2014/main" id="{F8D25A6A-B5DB-B41E-44A5-70562B881960}"/>
+              </a:ext>
+            </a:extLst>
+          </p:cNvPr>
+          <p:cNvPicPr>
+            <a:picLocks noChangeAspect="1"/>
+          </p:cNvPicPr>
+          <p:nvPr/>
+        </p:nvPicPr>
+        <p:blipFill>
+          <a:blip r:embed="rId2"/>
+          <a:stretch>
+            <a:fillRect/>
+          </a:stretch>
+        </p:blipFill>
+        <p:spPr>
+          <a:xfrm>
+            <a:off x="154379" y="868261"/>
+            <a:ext cx="6210613" cy="5398316"/>
+          </a:xfrm>
+          <a:prstGeom prst="rect">
+            <a:avLst/>
+          </a:prstGeom>
+        </p:spPr>
+      </p:pic>
+      <p:sp>
+        <p:nvSpPr>
+          <p:cNvPr id="11" name="テキスト ボックス 10">
+            <a:extLst>
+              <a:ext uri="{FF2B5EF4-FFF2-40B4-BE49-F238E27FC236}">
+                <a16:creationId xmlns:a16="http://schemas.microsoft.com/office/drawing/2014/main" id="{37F1F31D-6C18-AC4D-BFA0-C15D25BE27C5}"/>
+              </a:ext>
+            </a:extLst>
+          </p:cNvPr>
+          <p:cNvSpPr txBox="1"/>
+          <p:nvPr/>
+        </p:nvSpPr>
+        <p:spPr>
+          <a:xfrm>
+            <a:off x="5655733" y="709956"/>
+            <a:ext cx="4002423" cy="3323987"/>
+          </a:xfrm>
+          <a:prstGeom prst="rect">
+            <a:avLst/>
+          </a:prstGeom>
+          <a:solidFill>
+            <a:schemeClr val="accent6">
+              <a:lumMod val="20000"/>
+              <a:lumOff val="80000"/>
+            </a:schemeClr>
+          </a:solidFill>
+          <a:ln>
+            <a:solidFill>
+              <a:schemeClr val="bg2">
+                <a:lumMod val="90000"/>
+              </a:schemeClr>
+            </a:solidFill>
+          </a:ln>
+        </p:spPr>
+        <p:txBody>
+          <a:bodyPr wrap="square" rtlCol="0">
+            <a:spAutoFit/>
           </a:bodyPr>
           <a:lstStyle/>
           <a:p>
-            <a:r>
-              <a:rPr kumimoji="1" lang="ja-JP" altLang="en-US" sz="1600" dirty="0"/>
-              <a:t>本システムでは、メールを用いて予約日時を患者に伝えますが、メールが読まれるかどうかを判断する仕組みが不可欠です。</a:t>
-            </a:r>
-            <a:endParaRPr kumimoji="1" lang="en-US" altLang="ja-JP" sz="1600" dirty="0"/>
-          </a:p>
-          <a:p>
-            <a:r>
-              <a:rPr kumimoji="1" lang="ja-JP" altLang="en-US" sz="1600" dirty="0">
-                <a:solidFill>
-                  <a:srgbClr val="FF0000"/>
-                </a:solidFill>
+            <a:pPr lvl="0"/>
+            <a:r>
+              <a:rPr lang="ja-JP" altLang="ja-JP" sz="1400" dirty="0">
+                <a:latin typeface="メイリオ" panose="020B0604030504040204" pitchFamily="50" charset="-128"/>
+                <a:ea typeface="メイリオ" panose="020B0604030504040204" pitchFamily="50" charset="-128"/>
               </a:rPr>
-              <a:t>そこで、送信メール本文</a:t>
-            </a:r>
-            <a:r>
-              <a:rPr lang="ja-JP" altLang="en-US" sz="1600" dirty="0">
-                <a:solidFill>
-                  <a:srgbClr val="FF0000"/>
-                </a:solidFill>
+              <a:t> 新規に届いた予約依頼を受け止め、担当者を割り当てる「システムのエントランス（入り口）」です。</a:t>
+            </a:r>
+          </a:p>
+          <a:p>
+            <a:pPr lvl="0"/>
+            <a:endParaRPr lang="en-US" altLang="ja-JP" sz="1400" b="1" dirty="0">
+              <a:latin typeface="メイリオ" panose="020B0604030504040204" pitchFamily="50" charset="-128"/>
+              <a:ea typeface="メイリオ" panose="020B0604030504040204" pitchFamily="50" charset="-128"/>
+            </a:endParaRPr>
+          </a:p>
+          <a:p>
+            <a:pPr lvl="0"/>
+            <a:r>
+              <a:rPr lang="ja-JP" altLang="ja-JP" sz="1400" b="1" dirty="0">
+                <a:latin typeface="メイリオ" panose="020B0604030504040204" pitchFamily="50" charset="-128"/>
+                <a:ea typeface="メイリオ" panose="020B0604030504040204" pitchFamily="50" charset="-128"/>
               </a:rPr>
-              <a:t>には予約日時情報の表示を可能にするボタン（</a:t>
-            </a:r>
-            <a:r>
-              <a:rPr lang="en-US" altLang="ja-JP" sz="1600" dirty="0">
-                <a:solidFill>
-                  <a:srgbClr val="FF0000"/>
-                </a:solidFill>
+              <a:t>未着手</a:t>
+            </a:r>
+            <a:r>
+              <a:rPr lang="ja-JP" altLang="ja-JP" sz="1400" dirty="0">
+                <a:latin typeface="メイリオ" panose="020B0604030504040204" pitchFamily="50" charset="-128"/>
+                <a:ea typeface="メイリオ" panose="020B0604030504040204" pitchFamily="50" charset="-128"/>
               </a:rPr>
-              <a:t>URL)</a:t>
-            </a:r>
-            <a:r>
-              <a:rPr lang="ja-JP" altLang="en-US" sz="1600" dirty="0">
-                <a:solidFill>
-                  <a:srgbClr val="FF0000"/>
-                </a:solidFill>
+              <a:t> </a:t>
+            </a:r>
+            <a:endParaRPr lang="en-US" altLang="ja-JP" sz="1400" dirty="0">
+              <a:latin typeface="メイリオ" panose="020B0604030504040204" pitchFamily="50" charset="-128"/>
+              <a:ea typeface="メイリオ" panose="020B0604030504040204" pitchFamily="50" charset="-128"/>
+            </a:endParaRPr>
+          </a:p>
+          <a:p>
+            <a:pPr lvl="0"/>
+            <a:r>
+              <a:rPr lang="ja-JP" altLang="ja-JP" sz="1400" dirty="0">
+                <a:latin typeface="メイリオ" panose="020B0604030504040204" pitchFamily="50" charset="-128"/>
+                <a:ea typeface="メイリオ" panose="020B0604030504040204" pitchFamily="50" charset="-128"/>
               </a:rPr>
-              <a:t>のみを用意し、患者がメール内のそのボタンを「</a:t>
-            </a:r>
-            <a:r>
-              <a:rPr kumimoji="1" lang="ja-JP" altLang="en-US" sz="1600" dirty="0">
-                <a:solidFill>
-                  <a:srgbClr val="FF0000"/>
-                </a:solidFill>
+              <a:t>Webや電話から新しいチケットが届いた直後の状態です。「新規受付処理」を経て中身の確認を行います。</a:t>
+            </a:r>
+            <a:endParaRPr lang="en-US" altLang="ja-JP" sz="1400" dirty="0">
+              <a:latin typeface="メイリオ" panose="020B0604030504040204" pitchFamily="50" charset="-128"/>
+              <a:ea typeface="メイリオ" panose="020B0604030504040204" pitchFamily="50" charset="-128"/>
+            </a:endParaRPr>
+          </a:p>
+          <a:p>
+            <a:pPr lvl="0"/>
+            <a:endParaRPr lang="ja-JP" altLang="ja-JP" sz="1400" dirty="0">
+              <a:latin typeface="メイリオ" panose="020B0604030504040204" pitchFamily="50" charset="-128"/>
+              <a:ea typeface="メイリオ" panose="020B0604030504040204" pitchFamily="50" charset="-128"/>
+            </a:endParaRPr>
+          </a:p>
+          <a:p>
+            <a:pPr lvl="0"/>
+            <a:r>
+              <a:rPr lang="ja-JP" altLang="ja-JP" sz="1400" b="1" dirty="0">
+                <a:latin typeface="メイリオ" panose="020B0604030504040204" pitchFamily="50" charset="-128"/>
+                <a:ea typeface="メイリオ" panose="020B0604030504040204" pitchFamily="50" charset="-128"/>
               </a:rPr>
-              <a:t>一定の制限時間内（タイムアウト値）に押したことを本システムが検出した時点で合意成立と判断する仕組みになっています。</a:t>
-            </a:r>
-            <a:endParaRPr lang="en-US" altLang="ja-JP" sz="1600" dirty="0">
-              <a:solidFill>
-                <a:srgbClr val="FF0000"/>
-              </a:solidFill>
+              <a:t>担当設定</a:t>
+            </a:r>
+            <a:r>
+              <a:rPr lang="ja-JP" altLang="ja-JP" sz="1400" dirty="0">
+                <a:latin typeface="メイリオ" panose="020B0604030504040204" pitchFamily="50" charset="-128"/>
+                <a:ea typeface="メイリオ" panose="020B0604030504040204" pitchFamily="50" charset="-128"/>
+              </a:rPr>
+              <a:t> </a:t>
+            </a:r>
+            <a:endParaRPr lang="en-US" altLang="ja-JP" sz="1400" dirty="0">
+              <a:latin typeface="メイリオ" panose="020B0604030504040204" pitchFamily="50" charset="-128"/>
+              <a:ea typeface="メイリオ" panose="020B0604030504040204" pitchFamily="50" charset="-128"/>
             </a:endParaRPr>
           </a:p>
           <a:p>
-            <a:pPr marL="0" indent="0">
-              <a:buNone/>
-            </a:pPr>
-            <a:r>
-              <a:rPr lang="ja-JP" altLang="en-US" sz="1600" dirty="0"/>
-              <a:t>タイムアウト値は</a:t>
-            </a:r>
-            <a:r>
-              <a:rPr kumimoji="1" lang="ja-JP" altLang="en-US" sz="1600" dirty="0"/>
-              <a:t>メールを送信する段階で担当者が選択できます</a:t>
-            </a:r>
-            <a:r>
-              <a:rPr kumimoji="1" lang="en-US" altLang="ja-JP" sz="1600" dirty="0"/>
-              <a:t>(</a:t>
-            </a:r>
-            <a:r>
-              <a:rPr kumimoji="1" lang="ja-JP" altLang="en-US" sz="1600" dirty="0"/>
-              <a:t>デフォルトは</a:t>
-            </a:r>
-            <a:r>
-              <a:rPr kumimoji="1" lang="en-US" altLang="ja-JP" sz="1600" dirty="0"/>
-              <a:t>2</a:t>
-            </a:r>
-            <a:r>
-              <a:rPr kumimoji="1" lang="ja-JP" altLang="en-US" sz="1600" dirty="0"/>
-              <a:t>時間</a:t>
-            </a:r>
-            <a:r>
-              <a:rPr kumimoji="1" lang="en-US" altLang="ja-JP" sz="1600" dirty="0"/>
-              <a:t>)</a:t>
-            </a:r>
-          </a:p>
-          <a:p>
-            <a:pPr marL="0" indent="0">
-              <a:buNone/>
-            </a:pPr>
-            <a:r>
-              <a:rPr lang="ja-JP" altLang="en-US" sz="1600" dirty="0"/>
-              <a:t>スタッフが帰宅間際の場合には当日の処理は困難なので</a:t>
-            </a:r>
-            <a:r>
-              <a:rPr lang="en-US" altLang="ja-JP" sz="1600" dirty="0"/>
-              <a:t>2</a:t>
-            </a:r>
-            <a:r>
-              <a:rPr lang="ja-JP" altLang="en-US" sz="1600" dirty="0"/>
-              <a:t>時間ではなく、実質的に明日の診療開始まで影響がないため、本日中まででよいなどといった幅を持たせられるようになっています。退勤時間に近づくにつれ表示される選択肢は減ります。</a:t>
-            </a:r>
-            <a:endParaRPr lang="en-US" altLang="ja-JP" sz="1600" dirty="0"/>
-          </a:p>
-          <a:p>
-            <a:pPr marL="0" indent="0">
-              <a:buNone/>
-            </a:pPr>
-            <a:r>
-              <a:rPr lang="ja-JP" altLang="en-US" sz="1600" dirty="0"/>
-              <a:t>タイムアウト値になるまでは「仮の予約日時」という概念となり、その間は電子カルテ側の予約枠もほかにとられないように確保しておく必要があります。</a:t>
-            </a:r>
-            <a:endParaRPr kumimoji="1" lang="en-US" altLang="ja-JP" sz="1600" dirty="0"/>
-          </a:p>
-          <a:p>
-            <a:pPr marL="0" indent="0">
-              <a:buNone/>
-            </a:pPr>
-            <a:r>
-              <a:rPr lang="ja-JP" altLang="en-US" sz="1600" dirty="0"/>
-              <a:t>・一方で</a:t>
-            </a:r>
-            <a:r>
-              <a:rPr kumimoji="1" lang="ja-JP" altLang="en-US" sz="1600" dirty="0"/>
-              <a:t>タイムアウトになった場合には、患者がメールを読まなかったということなので、</a:t>
-            </a:r>
-            <a:endParaRPr kumimoji="1" lang="en-US" altLang="ja-JP" sz="1600" dirty="0"/>
-          </a:p>
-          <a:p>
-            <a:pPr marL="0" indent="0">
-              <a:buNone/>
-            </a:pPr>
-            <a:r>
-              <a:rPr lang="ja-JP" altLang="en-US" sz="1600" dirty="0"/>
-              <a:t>一旦電カルの予約枠は開放したうえで、そのまま放置し患者からの再依頼を待つ、スタッフから電話対応に切り替えて📞での調整に入るなどいくつか対応パターンが考えられます。</a:t>
-            </a:r>
-            <a:endParaRPr lang="en-US" altLang="ja-JP" sz="1600" dirty="0"/>
-          </a:p>
-          <a:p>
-            <a:pPr marL="0" indent="0">
-              <a:buNone/>
-            </a:pPr>
-            <a:r>
-              <a:rPr kumimoji="1" lang="ja-JP" altLang="en-US" sz="1600" dirty="0"/>
-              <a:t>・過去の履歴からメールでのやり取りがとりにくい、既読にならない傾向がある患者かもしれません。その場合は、チケット到着後に</a:t>
-            </a:r>
-            <a:r>
-              <a:rPr kumimoji="1" lang="en-US" altLang="ja-JP" sz="1600" dirty="0"/>
-              <a:t>CRM</a:t>
-            </a:r>
-            <a:r>
-              <a:rPr kumimoji="1" lang="ja-JP" altLang="en-US" sz="1600" dirty="0"/>
-              <a:t>情報を参考に</a:t>
-            </a:r>
-            <a:r>
-              <a:rPr lang="ja-JP" altLang="en-US" sz="1600" dirty="0"/>
-              <a:t>📧対応ではなく、</a:t>
-            </a:r>
-            <a:r>
-              <a:rPr kumimoji="1" lang="ja-JP" altLang="en-US" sz="1600" dirty="0"/>
-              <a:t>すぐに架電をして会話を始めたほうが繫がりやすい可能性もあるかもしれません。</a:t>
-            </a:r>
-            <a:endParaRPr kumimoji="1" lang="en-US" altLang="ja-JP" sz="1600" dirty="0"/>
-          </a:p>
-          <a:p>
-            <a:pPr marL="0" indent="0">
-              <a:buNone/>
-            </a:pPr>
-            <a:r>
-              <a:rPr lang="ja-JP" altLang="en-US" sz="1600" dirty="0"/>
-              <a:t>・なお、患者が意図せずタイムアウトした場合を考慮して、チケットを保留にしたまま、本日中であれば患者側が再依頼の入力手間なく依頼できるようになっています（ただしこの時点では仮予約は開放されていますのでスタッフは再度別の仮予約日を確保してメールを送信します）。</a:t>
-            </a:r>
-            <a:endParaRPr kumimoji="1" lang="en-US" altLang="ja-JP" sz="1600" dirty="0"/>
-          </a:p>
-          <a:p>
-            <a:pPr marL="0" indent="0">
-              <a:buNone/>
-            </a:pPr>
-            <a:endParaRPr kumimoji="1" lang="en-US" altLang="ja-JP" sz="1600" dirty="0"/>
-          </a:p>
-          <a:p>
-            <a:endParaRPr kumimoji="1" lang="ja-JP" altLang="en-US" sz="1600" dirty="0"/>
+            <a:pPr lvl="0"/>
+            <a:r>
+              <a:rPr lang="ja-JP" altLang="ja-JP" sz="1400" dirty="0">
+                <a:latin typeface="メイリオ" panose="020B0604030504040204" pitchFamily="50" charset="-128"/>
+                <a:ea typeface="メイリオ" panose="020B0604030504040204" pitchFamily="50" charset="-128"/>
+              </a:rPr>
+              <a:t>確認後、「担当者を設定する」ことでこの状態になります。ここから、ご案内の手段に合わせて【電話対応】または【メール対応】の各ブロックへと進みます。 （※担当者を未設定に戻し、未着手状態へ戻すことも可能です）</a:t>
+            </a:r>
+            <a:r>
+              <a:rPr lang="ja-JP" altLang="ja-JP" sz="1050" dirty="0">
+                <a:latin typeface="メイリオ" panose="020B0604030504040204" pitchFamily="50" charset="-128"/>
+                <a:ea typeface="メイリオ" panose="020B0604030504040204" pitchFamily="50" charset="-128"/>
+              </a:rPr>
+              <a:t>。</a:t>
+            </a:r>
           </a:p>
         </p:txBody>
       </p:sp>
     </p:spTree>
     <p:extLst>
       <p:ext uri="{BB962C8B-B14F-4D97-AF65-F5344CB8AC3E}">
-        <p14:creationId xmlns:p14="http://schemas.microsoft.com/office/powerpoint/2010/main" val="1175235402"/>
+        <p14:creationId xmlns:p14="http://schemas.microsoft.com/office/powerpoint/2010/main" val="1489682293"/>
       </p:ext>
     </p:extLst>
   </p:cSld>
@@ -1926,7 +1837,7 @@
           <p:cNvPr id="2" name="タイトル 1">
             <a:extLst>
               <a:ext uri="{FF2B5EF4-FFF2-40B4-BE49-F238E27FC236}">
-                <a16:creationId xmlns:a16="http://schemas.microsoft.com/office/drawing/2014/main" id="{F2515E7A-0D6C-0149-01D2-D25E9EB55622}"/>
+                <a16:creationId xmlns:a16="http://schemas.microsoft.com/office/drawing/2014/main" id="{65DBE6F8-EBD9-50C8-06CA-77882AA69225}"/>
               </a:ext>
             </a:extLst>
           </p:cNvPr>
@@ -1943,41 +1854,174 @@
           <a:lstStyle/>
           <a:p>
             <a:r>
-              <a:rPr kumimoji="1" lang="ja-JP" altLang="en-US" dirty="0"/>
-              <a:t>スタッフ設定</a:t>
-            </a:r>
-          </a:p>
-        </p:txBody>
-      </p:sp>
-      <p:sp>
-        <p:nvSpPr>
-          <p:cNvPr id="3" name="コンテンツ プレースホルダー 2">
-            <a:extLst>
-              <a:ext uri="{FF2B5EF4-FFF2-40B4-BE49-F238E27FC236}">
-                <a16:creationId xmlns:a16="http://schemas.microsoft.com/office/drawing/2014/main" id="{4BFA1D67-9FA8-6403-26A9-6E68B224CA0C}"/>
-              </a:ext>
-            </a:extLst>
-          </p:cNvPr>
-          <p:cNvSpPr>
-            <a:spLocks noGrp="1"/>
-          </p:cNvSpPr>
-          <p:nvPr>
-            <p:ph idx="1"/>
-          </p:nvPr>
-        </p:nvSpPr>
-        <p:spPr/>
-        <p:txBody>
-          <a:bodyPr/>
-          <a:lstStyle/>
-          <a:p>
-            <a:endParaRPr kumimoji="1" lang="ja-JP" altLang="en-US"/>
+              <a:rPr lang="ja-JP" altLang="ja-JP" dirty="0"/>
+              <a:t>【電話対応】ブロック</a:t>
+            </a:r>
+            <a:endParaRPr kumimoji="1" lang="ja-JP" altLang="en-US" dirty="0"/>
+          </a:p>
+        </p:txBody>
+      </p:sp>
+      <p:pic>
+        <p:nvPicPr>
+          <p:cNvPr id="9" name="図 8">
+            <a:extLst>
+              <a:ext uri="{FF2B5EF4-FFF2-40B4-BE49-F238E27FC236}">
+                <a16:creationId xmlns:a16="http://schemas.microsoft.com/office/drawing/2014/main" id="{2D8F6F77-66D4-D95F-9D79-0E7DC9A6ABA7}"/>
+              </a:ext>
+            </a:extLst>
+          </p:cNvPr>
+          <p:cNvPicPr>
+            <a:picLocks noChangeAspect="1"/>
+          </p:cNvPicPr>
+          <p:nvPr/>
+        </p:nvPicPr>
+        <p:blipFill>
+          <a:blip r:embed="rId2"/>
+          <a:stretch>
+            <a:fillRect/>
+          </a:stretch>
+        </p:blipFill>
+        <p:spPr>
+          <a:xfrm>
+            <a:off x="473977" y="842279"/>
+            <a:ext cx="4789786" cy="5722106"/>
+          </a:xfrm>
+          <a:prstGeom prst="rect">
+            <a:avLst/>
+          </a:prstGeom>
+        </p:spPr>
+      </p:pic>
+      <p:sp>
+        <p:nvSpPr>
+          <p:cNvPr id="11" name="テキスト ボックス 10">
+            <a:extLst>
+              <a:ext uri="{FF2B5EF4-FFF2-40B4-BE49-F238E27FC236}">
+                <a16:creationId xmlns:a16="http://schemas.microsoft.com/office/drawing/2014/main" id="{F43E1E46-7F20-2D4B-E907-EDD5F985791B}"/>
+              </a:ext>
+            </a:extLst>
+          </p:cNvPr>
+          <p:cNvSpPr txBox="1"/>
+          <p:nvPr/>
+        </p:nvSpPr>
+        <p:spPr>
+          <a:xfrm>
+            <a:off x="5461816" y="1090956"/>
+            <a:ext cx="3768773" cy="3323987"/>
+          </a:xfrm>
+          <a:prstGeom prst="rect">
+            <a:avLst/>
+          </a:prstGeom>
+          <a:solidFill>
+            <a:schemeClr val="accent6">
+              <a:lumMod val="20000"/>
+              <a:lumOff val="80000"/>
+            </a:schemeClr>
+          </a:solidFill>
+          <a:ln>
+            <a:solidFill>
+              <a:schemeClr val="bg2">
+                <a:lumMod val="90000"/>
+              </a:schemeClr>
+            </a:solidFill>
+          </a:ln>
+        </p:spPr>
+        <p:txBody>
+          <a:bodyPr wrap="square" rtlCol="0">
+            <a:spAutoFit/>
+          </a:bodyPr>
+          <a:lstStyle/>
+          <a:p>
+            <a:pPr lvl="0"/>
+            <a:r>
+              <a:rPr lang="ja-JP" altLang="ja-JP" sz="1400" dirty="0">
+                <a:latin typeface="メイリオ" panose="020B0604030504040204" pitchFamily="50" charset="-128"/>
+                <a:ea typeface="メイリオ" panose="020B0604030504040204" pitchFamily="50" charset="-128"/>
+              </a:rPr>
+              <a:t>システム経由の自動案内ではなく、スタッフが直接お電話で日時の調整や合意を行うルートです。</a:t>
+            </a:r>
+          </a:p>
+          <a:p>
+            <a:pPr lvl="0"/>
+            <a:endParaRPr lang="en-US" altLang="ja-JP" sz="1400" b="1" dirty="0">
+              <a:latin typeface="メイリオ" panose="020B0604030504040204" pitchFamily="50" charset="-128"/>
+              <a:ea typeface="メイリオ" panose="020B0604030504040204" pitchFamily="50" charset="-128"/>
+            </a:endParaRPr>
+          </a:p>
+          <a:p>
+            <a:pPr lvl="0"/>
+            <a:r>
+              <a:rPr lang="ja-JP" altLang="ja-JP" sz="1400" b="1" dirty="0">
+                <a:latin typeface="メイリオ" panose="020B0604030504040204" pitchFamily="50" charset="-128"/>
+                <a:ea typeface="メイリオ" panose="020B0604030504040204" pitchFamily="50" charset="-128"/>
+              </a:rPr>
+              <a:t>電話合意済</a:t>
+            </a:r>
+            <a:r>
+              <a:rPr lang="ja-JP" altLang="ja-JP" sz="1400" dirty="0">
+                <a:latin typeface="メイリオ" panose="020B0604030504040204" pitchFamily="50" charset="-128"/>
+                <a:ea typeface="メイリオ" panose="020B0604030504040204" pitchFamily="50" charset="-128"/>
+              </a:rPr>
+              <a:t> </a:t>
+            </a:r>
+            <a:endParaRPr lang="en-US" altLang="ja-JP" sz="1400" dirty="0">
+              <a:latin typeface="メイリオ" panose="020B0604030504040204" pitchFamily="50" charset="-128"/>
+              <a:ea typeface="メイリオ" panose="020B0604030504040204" pitchFamily="50" charset="-128"/>
+            </a:endParaRPr>
+          </a:p>
+          <a:p>
+            <a:pPr lvl="0"/>
+            <a:r>
+              <a:rPr lang="ja-JP" altLang="ja-JP" sz="1400" dirty="0">
+                <a:latin typeface="メイリオ" panose="020B0604030504040204" pitchFamily="50" charset="-128"/>
+                <a:ea typeface="メイリオ" panose="020B0604030504040204" pitchFamily="50" charset="-128"/>
+              </a:rPr>
+              <a:t>お電話にて直接ご希望日時に合意できた状態です。これ以降は受診日を待つだけとなるため、そのまま【完了・評価】ブロックへ進みます。</a:t>
+            </a:r>
+          </a:p>
+          <a:p>
+            <a:pPr lvl="0"/>
+            <a:endParaRPr lang="en-US" altLang="ja-JP" sz="1400" b="1" dirty="0">
+              <a:latin typeface="メイリオ" panose="020B0604030504040204" pitchFamily="50" charset="-128"/>
+              <a:ea typeface="メイリオ" panose="020B0604030504040204" pitchFamily="50" charset="-128"/>
+            </a:endParaRPr>
+          </a:p>
+          <a:p>
+            <a:pPr lvl="0"/>
+            <a:r>
+              <a:rPr lang="ja-JP" altLang="ja-JP" sz="1400" b="1" dirty="0">
+                <a:latin typeface="メイリオ" panose="020B0604030504040204" pitchFamily="50" charset="-128"/>
+                <a:ea typeface="メイリオ" panose="020B0604030504040204" pitchFamily="50" charset="-128"/>
+              </a:rPr>
+              <a:t>電話不通</a:t>
+            </a:r>
+            <a:r>
+              <a:rPr lang="ja-JP" altLang="ja-JP" sz="1400" dirty="0">
+                <a:latin typeface="メイリオ" panose="020B0604030504040204" pitchFamily="50" charset="-128"/>
+                <a:ea typeface="メイリオ" panose="020B0604030504040204" pitchFamily="50" charset="-128"/>
+              </a:rPr>
+              <a:t> </a:t>
+            </a:r>
+            <a:endParaRPr lang="en-US" altLang="ja-JP" sz="1400" dirty="0">
+              <a:latin typeface="メイリオ" panose="020B0604030504040204" pitchFamily="50" charset="-128"/>
+              <a:ea typeface="メイリオ" panose="020B0604030504040204" pitchFamily="50" charset="-128"/>
+            </a:endParaRPr>
+          </a:p>
+          <a:p>
+            <a:pPr lvl="0"/>
+            <a:r>
+              <a:rPr lang="ja-JP" altLang="ja-JP" sz="1400" dirty="0">
+                <a:latin typeface="メイリオ" panose="020B0604030504040204" pitchFamily="50" charset="-128"/>
+                <a:ea typeface="メイリオ" panose="020B0604030504040204" pitchFamily="50" charset="-128"/>
+              </a:rPr>
+              <a:t>架電しても繋がらなかった場合、「電話不通案内メールを送信」してこの状態にします。後日折り返しがあり合意できた場合は、「電話合意済」へ進みます。</a:t>
+            </a:r>
           </a:p>
         </p:txBody>
       </p:sp>
     </p:spTree>
     <p:extLst>
       <p:ext uri="{BB962C8B-B14F-4D97-AF65-F5344CB8AC3E}">
-        <p14:creationId xmlns:p14="http://schemas.microsoft.com/office/powerpoint/2010/main" val="852097310"/>
+        <p14:creationId xmlns:p14="http://schemas.microsoft.com/office/powerpoint/2010/main" val="1957144974"/>
       </p:ext>
     </p:extLst>
   </p:cSld>
@@ -1988,6 +2032,658 @@
 </file>
 
 <file path=ppt/slides/slide15.xml><?xml version="1.0" encoding="utf-8"?>
+<p:sld xmlns:a="http://schemas.openxmlformats.org/drawingml/2006/main" xmlns:r="http://schemas.openxmlformats.org/officeDocument/2006/relationships" xmlns:p="http://schemas.openxmlformats.org/presentationml/2006/main">
+  <p:cSld>
+    <p:spTree>
+      <p:nvGrpSpPr>
+        <p:cNvPr id="1" name=""/>
+        <p:cNvGrpSpPr/>
+        <p:nvPr/>
+      </p:nvGrpSpPr>
+      <p:grpSpPr>
+        <a:xfrm>
+          <a:off x="0" y="0"/>
+          <a:ext cx="0" cy="0"/>
+          <a:chOff x="0" y="0"/>
+          <a:chExt cx="0" cy="0"/>
+        </a:xfrm>
+      </p:grpSpPr>
+      <p:sp>
+        <p:nvSpPr>
+          <p:cNvPr id="2" name="タイトル 1">
+            <a:extLst>
+              <a:ext uri="{FF2B5EF4-FFF2-40B4-BE49-F238E27FC236}">
+                <a16:creationId xmlns:a16="http://schemas.microsoft.com/office/drawing/2014/main" id="{F642EE5D-F8CF-A507-E743-193455A20879}"/>
+              </a:ext>
+            </a:extLst>
+          </p:cNvPr>
+          <p:cNvSpPr>
+            <a:spLocks noGrp="1"/>
+          </p:cNvSpPr>
+          <p:nvPr>
+            <p:ph type="title"/>
+          </p:nvPr>
+        </p:nvSpPr>
+        <p:spPr/>
+        <p:txBody>
+          <a:bodyPr/>
+          <a:lstStyle/>
+          <a:p>
+            <a:r>
+              <a:rPr lang="ja-JP" altLang="ja-JP" dirty="0"/>
+              <a:t>【メール対応】ブロック</a:t>
+            </a:r>
+            <a:endParaRPr kumimoji="1" lang="ja-JP" altLang="en-US" dirty="0"/>
+          </a:p>
+        </p:txBody>
+      </p:sp>
+      <p:pic>
+        <p:nvPicPr>
+          <p:cNvPr id="9" name="図 8">
+            <a:extLst>
+              <a:ext uri="{FF2B5EF4-FFF2-40B4-BE49-F238E27FC236}">
+                <a16:creationId xmlns:a16="http://schemas.microsoft.com/office/drawing/2014/main" id="{F82866A2-383B-2D22-3D93-CA10D3A0E707}"/>
+              </a:ext>
+            </a:extLst>
+          </p:cNvPr>
+          <p:cNvPicPr>
+            <a:picLocks noChangeAspect="1"/>
+          </p:cNvPicPr>
+          <p:nvPr/>
+        </p:nvPicPr>
+        <p:blipFill>
+          <a:blip r:embed="rId2"/>
+          <a:stretch>
+            <a:fillRect/>
+          </a:stretch>
+        </p:blipFill>
+        <p:spPr>
+          <a:xfrm>
+            <a:off x="123223" y="555115"/>
+            <a:ext cx="4517421" cy="6189133"/>
+          </a:xfrm>
+          <a:prstGeom prst="rect">
+            <a:avLst/>
+          </a:prstGeom>
+        </p:spPr>
+      </p:pic>
+      <p:sp>
+        <p:nvSpPr>
+          <p:cNvPr id="11" name="テキスト ボックス 10">
+            <a:extLst>
+              <a:ext uri="{FF2B5EF4-FFF2-40B4-BE49-F238E27FC236}">
+                <a16:creationId xmlns:a16="http://schemas.microsoft.com/office/drawing/2014/main" id="{DDB8F422-37EE-858B-432B-A99710E8BA9C}"/>
+              </a:ext>
+            </a:extLst>
+          </p:cNvPr>
+          <p:cNvSpPr txBox="1"/>
+          <p:nvPr/>
+        </p:nvSpPr>
+        <p:spPr>
+          <a:xfrm>
+            <a:off x="5372916" y="1429622"/>
+            <a:ext cx="3768773" cy="3323987"/>
+          </a:xfrm>
+          <a:prstGeom prst="rect">
+            <a:avLst/>
+          </a:prstGeom>
+          <a:solidFill>
+            <a:schemeClr val="accent6">
+              <a:lumMod val="20000"/>
+              <a:lumOff val="80000"/>
+            </a:schemeClr>
+          </a:solidFill>
+          <a:ln>
+            <a:solidFill>
+              <a:schemeClr val="bg2">
+                <a:lumMod val="90000"/>
+              </a:schemeClr>
+            </a:solidFill>
+          </a:ln>
+        </p:spPr>
+        <p:txBody>
+          <a:bodyPr wrap="square" rtlCol="0">
+            <a:spAutoFit/>
+          </a:bodyPr>
+          <a:lstStyle/>
+          <a:p>
+            <a:pPr lvl="0"/>
+            <a:r>
+              <a:rPr lang="ja-JP" altLang="ja-JP" sz="1400" dirty="0">
+                <a:latin typeface="メイリオ" panose="020B0604030504040204" pitchFamily="50" charset="-128"/>
+                <a:ea typeface="メイリオ" panose="020B0604030504040204" pitchFamily="50" charset="-128"/>
+              </a:rPr>
+              <a:t>システムから自動で案内メールを送信し、患者のアクション（既読・再依頼）をベースに進行する標準ルートです。</a:t>
+            </a:r>
+            <a:endParaRPr lang="en-US" altLang="ja-JP" sz="1400" dirty="0">
+              <a:latin typeface="メイリオ" panose="020B0604030504040204" pitchFamily="50" charset="-128"/>
+              <a:ea typeface="メイリオ" panose="020B0604030504040204" pitchFamily="50" charset="-128"/>
+            </a:endParaRPr>
+          </a:p>
+          <a:p>
+            <a:pPr lvl="0"/>
+            <a:endParaRPr lang="ja-JP" altLang="ja-JP" sz="1400" dirty="0">
+              <a:latin typeface="メイリオ" panose="020B0604030504040204" pitchFamily="50" charset="-128"/>
+              <a:ea typeface="メイリオ" panose="020B0604030504040204" pitchFamily="50" charset="-128"/>
+            </a:endParaRPr>
+          </a:p>
+          <a:p>
+            <a:pPr lvl="0"/>
+            <a:r>
+              <a:rPr lang="ja-JP" altLang="ja-JP" sz="1400" b="1" dirty="0">
+                <a:latin typeface="メイリオ" panose="020B0604030504040204" pitchFamily="50" charset="-128"/>
+                <a:ea typeface="メイリオ" panose="020B0604030504040204" pitchFamily="50" charset="-128"/>
+              </a:rPr>
+              <a:t>メール送信済 ＆ メール既読</a:t>
+            </a:r>
+            <a:endParaRPr lang="en-US" altLang="ja-JP" sz="1400" b="1" dirty="0">
+              <a:latin typeface="メイリオ" panose="020B0604030504040204" pitchFamily="50" charset="-128"/>
+              <a:ea typeface="メイリオ" panose="020B0604030504040204" pitchFamily="50" charset="-128"/>
+            </a:endParaRPr>
+          </a:p>
+          <a:p>
+            <a:pPr lvl="0"/>
+            <a:r>
+              <a:rPr lang="ja-JP" altLang="ja-JP" sz="1400" dirty="0">
+                <a:latin typeface="メイリオ" panose="020B0604030504040204" pitchFamily="50" charset="-128"/>
+                <a:ea typeface="メイリオ" panose="020B0604030504040204" pitchFamily="50" charset="-128"/>
+              </a:rPr>
+              <a:t> 仮予約の案内メールを送信し、患者が開封すると自動で「メール既読」となります。既読後は受診日を待つため【完了・評価】ブロックへ進みます。</a:t>
+            </a:r>
+            <a:endParaRPr lang="en-US" altLang="ja-JP" sz="1400" dirty="0">
+              <a:latin typeface="メイリオ" panose="020B0604030504040204" pitchFamily="50" charset="-128"/>
+              <a:ea typeface="メイリオ" panose="020B0604030504040204" pitchFamily="50" charset="-128"/>
+            </a:endParaRPr>
+          </a:p>
+          <a:p>
+            <a:pPr lvl="0"/>
+            <a:endParaRPr lang="ja-JP" altLang="ja-JP" sz="1400" dirty="0">
+              <a:latin typeface="メイリオ" panose="020B0604030504040204" pitchFamily="50" charset="-128"/>
+              <a:ea typeface="メイリオ" panose="020B0604030504040204" pitchFamily="50" charset="-128"/>
+            </a:endParaRPr>
+          </a:p>
+          <a:p>
+            <a:pPr lvl="0"/>
+            <a:r>
+              <a:rPr lang="ja-JP" altLang="ja-JP" sz="1400" b="1" dirty="0">
+                <a:latin typeface="メイリオ" panose="020B0604030504040204" pitchFamily="50" charset="-128"/>
+                <a:ea typeface="メイリオ" panose="020B0604030504040204" pitchFamily="50" charset="-128"/>
+              </a:rPr>
+              <a:t>閲覧期限切れ ＆ 申込者再依頼</a:t>
+            </a:r>
+            <a:r>
+              <a:rPr lang="ja-JP" altLang="ja-JP" sz="1400" dirty="0">
+                <a:latin typeface="メイリオ" panose="020B0604030504040204" pitchFamily="50" charset="-128"/>
+                <a:ea typeface="メイリオ" panose="020B0604030504040204" pitchFamily="50" charset="-128"/>
+              </a:rPr>
+              <a:t> </a:t>
+            </a:r>
+            <a:endParaRPr lang="en-US" altLang="ja-JP" sz="1400" dirty="0">
+              <a:latin typeface="メイリオ" panose="020B0604030504040204" pitchFamily="50" charset="-128"/>
+              <a:ea typeface="メイリオ" panose="020B0604030504040204" pitchFamily="50" charset="-128"/>
+            </a:endParaRPr>
+          </a:p>
+          <a:p>
+            <a:pPr lvl="0"/>
+            <a:r>
+              <a:rPr lang="ja-JP" altLang="ja-JP" sz="1400" dirty="0">
+                <a:latin typeface="メイリオ" panose="020B0604030504040204" pitchFamily="50" charset="-128"/>
+                <a:ea typeface="メイリオ" panose="020B0604030504040204" pitchFamily="50" charset="-128"/>
+              </a:rPr>
+              <a:t>メールが一定期間開封されないと「閲覧期限切れ」になります。また、患者から別日時の希望があった場合は「申込者再依頼」となり、再度メールを送信して調整を繰り返します。</a:t>
+            </a:r>
+          </a:p>
+        </p:txBody>
+      </p:sp>
+    </p:spTree>
+    <p:extLst>
+      <p:ext uri="{BB962C8B-B14F-4D97-AF65-F5344CB8AC3E}">
+        <p14:creationId xmlns:p14="http://schemas.microsoft.com/office/powerpoint/2010/main" val="3364840994"/>
+      </p:ext>
+    </p:extLst>
+  </p:cSld>
+  <p:clrMapOvr>
+    <a:masterClrMapping/>
+  </p:clrMapOvr>
+</p:sld>
+</file>
+
+<file path=ppt/slides/slide16.xml><?xml version="1.0" encoding="utf-8"?>
+<p:sld xmlns:a="http://schemas.openxmlformats.org/drawingml/2006/main" xmlns:r="http://schemas.openxmlformats.org/officeDocument/2006/relationships" xmlns:p="http://schemas.openxmlformats.org/presentationml/2006/main">
+  <p:cSld>
+    <p:spTree>
+      <p:nvGrpSpPr>
+        <p:cNvPr id="1" name=""/>
+        <p:cNvGrpSpPr/>
+        <p:nvPr/>
+      </p:nvGrpSpPr>
+      <p:grpSpPr>
+        <a:xfrm>
+          <a:off x="0" y="0"/>
+          <a:ext cx="0" cy="0"/>
+          <a:chOff x="0" y="0"/>
+          <a:chExt cx="0" cy="0"/>
+        </a:xfrm>
+      </p:grpSpPr>
+      <p:sp>
+        <p:nvSpPr>
+          <p:cNvPr id="2" name="タイトル 1">
+            <a:extLst>
+              <a:ext uri="{FF2B5EF4-FFF2-40B4-BE49-F238E27FC236}">
+                <a16:creationId xmlns:a16="http://schemas.microsoft.com/office/drawing/2014/main" id="{C9814B44-B397-6898-DE1C-A75F393E51C1}"/>
+              </a:ext>
+            </a:extLst>
+          </p:cNvPr>
+          <p:cNvSpPr>
+            <a:spLocks noGrp="1"/>
+          </p:cNvSpPr>
+          <p:nvPr>
+            <p:ph type="title"/>
+          </p:nvPr>
+        </p:nvSpPr>
+        <p:spPr/>
+        <p:txBody>
+          <a:bodyPr/>
+          <a:lstStyle/>
+          <a:p>
+            <a:r>
+              <a:rPr lang="ja-JP" altLang="ja-JP" dirty="0"/>
+              <a:t>【完了・評価】ブロック</a:t>
+            </a:r>
+            <a:endParaRPr kumimoji="1" lang="ja-JP" altLang="en-US" dirty="0"/>
+          </a:p>
+        </p:txBody>
+      </p:sp>
+      <p:pic>
+        <p:nvPicPr>
+          <p:cNvPr id="5" name="コンテンツ プレースホルダー 4">
+            <a:extLst>
+              <a:ext uri="{FF2B5EF4-FFF2-40B4-BE49-F238E27FC236}">
+                <a16:creationId xmlns:a16="http://schemas.microsoft.com/office/drawing/2014/main" id="{FDD7B2D3-058C-49E7-D7B8-3C63E4EC69F9}"/>
+              </a:ext>
+            </a:extLst>
+          </p:cNvPr>
+          <p:cNvPicPr>
+            <a:picLocks noGrp="1" noChangeAspect="1"/>
+          </p:cNvPicPr>
+          <p:nvPr>
+            <p:ph idx="1"/>
+          </p:nvPr>
+        </p:nvPicPr>
+        <p:blipFill>
+          <a:blip r:embed="rId2"/>
+          <a:stretch>
+            <a:fillRect/>
+          </a:stretch>
+        </p:blipFill>
+        <p:spPr>
+          <a:xfrm>
+            <a:off x="215662" y="1216405"/>
+            <a:ext cx="5459715" cy="5000712"/>
+          </a:xfrm>
+          <a:prstGeom prst="rect">
+            <a:avLst/>
+          </a:prstGeom>
+        </p:spPr>
+      </p:pic>
+      <p:sp>
+        <p:nvSpPr>
+          <p:cNvPr id="7" name="テキスト ボックス 6">
+            <a:extLst>
+              <a:ext uri="{FF2B5EF4-FFF2-40B4-BE49-F238E27FC236}">
+                <a16:creationId xmlns:a16="http://schemas.microsoft.com/office/drawing/2014/main" id="{2A9B531D-1905-F614-C13B-AADA5AB40A54}"/>
+              </a:ext>
+            </a:extLst>
+          </p:cNvPr>
+          <p:cNvSpPr txBox="1"/>
+          <p:nvPr/>
+        </p:nvSpPr>
+        <p:spPr>
+          <a:xfrm>
+            <a:off x="5550716" y="1615889"/>
+            <a:ext cx="3948884" cy="3323987"/>
+          </a:xfrm>
+          <a:prstGeom prst="rect">
+            <a:avLst/>
+          </a:prstGeom>
+          <a:solidFill>
+            <a:schemeClr val="accent6">
+              <a:lumMod val="20000"/>
+              <a:lumOff val="80000"/>
+            </a:schemeClr>
+          </a:solidFill>
+          <a:ln>
+            <a:solidFill>
+              <a:schemeClr val="bg2">
+                <a:lumMod val="90000"/>
+              </a:schemeClr>
+            </a:solidFill>
+          </a:ln>
+        </p:spPr>
+        <p:txBody>
+          <a:bodyPr wrap="square" rtlCol="0">
+            <a:spAutoFit/>
+          </a:bodyPr>
+          <a:lstStyle/>
+          <a:p>
+            <a:pPr lvl="0"/>
+            <a:r>
+              <a:rPr lang="ja-JP" altLang="ja-JP" sz="1400" dirty="0">
+                <a:latin typeface="メイリオ" panose="020B0604030504040204" pitchFamily="50" charset="-128"/>
+                <a:ea typeface="メイリオ" panose="020B0604030504040204" pitchFamily="50" charset="-128"/>
+              </a:rPr>
+              <a:t>受診予定日を無事に通過したチケット、または破棄が確定したチケットを最終的に「クローズ（終了）」するブロックです。</a:t>
+            </a:r>
+          </a:p>
+          <a:p>
+            <a:pPr lvl="0"/>
+            <a:endParaRPr lang="en-US" altLang="ja-JP" sz="1400" b="1" dirty="0">
+              <a:latin typeface="メイリオ" panose="020B0604030504040204" pitchFamily="50" charset="-128"/>
+              <a:ea typeface="メイリオ" panose="020B0604030504040204" pitchFamily="50" charset="-128"/>
+            </a:endParaRPr>
+          </a:p>
+          <a:p>
+            <a:pPr lvl="0"/>
+            <a:r>
+              <a:rPr lang="ja-JP" altLang="ja-JP" sz="1400" b="1" dirty="0">
+                <a:latin typeface="メイリオ" panose="020B0604030504040204" pitchFamily="50" charset="-128"/>
+                <a:ea typeface="メイリオ" panose="020B0604030504040204" pitchFamily="50" charset="-128"/>
+              </a:rPr>
+              <a:t>評価待ち</a:t>
+            </a:r>
+            <a:r>
+              <a:rPr lang="ja-JP" altLang="ja-JP" sz="1400" dirty="0">
+                <a:latin typeface="メイリオ" panose="020B0604030504040204" pitchFamily="50" charset="-128"/>
+                <a:ea typeface="メイリオ" panose="020B0604030504040204" pitchFamily="50" charset="-128"/>
+              </a:rPr>
+              <a:t> </a:t>
+            </a:r>
+            <a:endParaRPr lang="en-US" altLang="ja-JP" sz="1400" dirty="0">
+              <a:latin typeface="メイリオ" panose="020B0604030504040204" pitchFamily="50" charset="-128"/>
+              <a:ea typeface="メイリオ" panose="020B0604030504040204" pitchFamily="50" charset="-128"/>
+            </a:endParaRPr>
+          </a:p>
+          <a:p>
+            <a:pPr lvl="0"/>
+            <a:r>
+              <a:rPr lang="ja-JP" altLang="ja-JP" sz="1400" dirty="0">
+                <a:latin typeface="メイリオ" panose="020B0604030504040204" pitchFamily="50" charset="-128"/>
+                <a:ea typeface="メイリオ" panose="020B0604030504040204" pitchFamily="50" charset="-128"/>
+              </a:rPr>
+              <a:t>【電話対応】または【メール対応】を経て診療予定日が経過すると、翌朝自動的にこの状態になります（一覧上で青色表示になります）。</a:t>
+            </a:r>
+          </a:p>
+          <a:p>
+            <a:pPr lvl="0"/>
+            <a:endParaRPr lang="en-US" altLang="ja-JP" sz="1400" b="1" dirty="0">
+              <a:latin typeface="メイリオ" panose="020B0604030504040204" pitchFamily="50" charset="-128"/>
+              <a:ea typeface="メイリオ" panose="020B0604030504040204" pitchFamily="50" charset="-128"/>
+            </a:endParaRPr>
+          </a:p>
+          <a:p>
+            <a:pPr lvl="0"/>
+            <a:r>
+              <a:rPr lang="ja-JP" altLang="ja-JP" sz="1400" b="1" dirty="0">
+                <a:latin typeface="メイリオ" panose="020B0604030504040204" pitchFamily="50" charset="-128"/>
+                <a:ea typeface="メイリオ" panose="020B0604030504040204" pitchFamily="50" charset="-128"/>
+              </a:rPr>
+              <a:t>終了</a:t>
+            </a:r>
+            <a:r>
+              <a:rPr lang="ja-JP" altLang="ja-JP" sz="1400" dirty="0">
+                <a:latin typeface="メイリオ" panose="020B0604030504040204" pitchFamily="50" charset="-128"/>
+                <a:ea typeface="メイリオ" panose="020B0604030504040204" pitchFamily="50" charset="-128"/>
+              </a:rPr>
+              <a:t> </a:t>
+            </a:r>
+            <a:endParaRPr lang="en-US" altLang="ja-JP" sz="1400" dirty="0">
+              <a:latin typeface="メイリオ" panose="020B0604030504040204" pitchFamily="50" charset="-128"/>
+              <a:ea typeface="メイリオ" panose="020B0604030504040204" pitchFamily="50" charset="-128"/>
+            </a:endParaRPr>
+          </a:p>
+          <a:p>
+            <a:pPr lvl="0"/>
+            <a:r>
+              <a:rPr lang="ja-JP" altLang="ja-JP" sz="1400" dirty="0">
+                <a:latin typeface="メイリオ" panose="020B0604030504040204" pitchFamily="50" charset="-128"/>
+                <a:ea typeface="メイリオ" panose="020B0604030504040204" pitchFamily="50" charset="-128"/>
+              </a:rPr>
+              <a:t>スタッフが受診の有無を確認し、メモを入力して「受診確認」を完了させると、チケットの全サイクルが「終了」となります。（中断処理から破棄として確定されたチケットも最終的にここへ合流します）</a:t>
+            </a:r>
+          </a:p>
+        </p:txBody>
+      </p:sp>
+    </p:spTree>
+    <p:extLst>
+      <p:ext uri="{BB962C8B-B14F-4D97-AF65-F5344CB8AC3E}">
+        <p14:creationId xmlns:p14="http://schemas.microsoft.com/office/powerpoint/2010/main" val="506159046"/>
+      </p:ext>
+    </p:extLst>
+  </p:cSld>
+  <p:clrMapOvr>
+    <a:masterClrMapping/>
+  </p:clrMapOvr>
+</p:sld>
+</file>
+
+<file path=ppt/slides/slide17.xml><?xml version="1.0" encoding="utf-8"?>
+<p:sld xmlns:a="http://schemas.openxmlformats.org/drawingml/2006/main" xmlns:r="http://schemas.openxmlformats.org/officeDocument/2006/relationships" xmlns:p="http://schemas.openxmlformats.org/presentationml/2006/main">
+  <p:cSld>
+    <p:spTree>
+      <p:nvGrpSpPr>
+        <p:cNvPr id="1" name=""/>
+        <p:cNvGrpSpPr/>
+        <p:nvPr/>
+      </p:nvGrpSpPr>
+      <p:grpSpPr>
+        <a:xfrm>
+          <a:off x="0" y="0"/>
+          <a:ext cx="0" cy="0"/>
+          <a:chOff x="0" y="0"/>
+          <a:chExt cx="0" cy="0"/>
+        </a:xfrm>
+      </p:grpSpPr>
+      <p:sp>
+        <p:nvSpPr>
+          <p:cNvPr id="2" name="タイトル 1">
+            <a:extLst>
+              <a:ext uri="{FF2B5EF4-FFF2-40B4-BE49-F238E27FC236}">
+                <a16:creationId xmlns:a16="http://schemas.microsoft.com/office/drawing/2014/main" id="{7A0648EA-FA30-1032-DCA2-8EAD84C340AD}"/>
+              </a:ext>
+            </a:extLst>
+          </p:cNvPr>
+          <p:cNvSpPr>
+            <a:spLocks noGrp="1"/>
+          </p:cNvSpPr>
+          <p:nvPr>
+            <p:ph type="title"/>
+          </p:nvPr>
+        </p:nvSpPr>
+        <p:spPr/>
+        <p:txBody>
+          <a:bodyPr/>
+          <a:lstStyle/>
+          <a:p>
+            <a:r>
+              <a:rPr lang="ja-JP" altLang="ja-JP" dirty="0"/>
+              <a:t>【各種中断処理】ブロック</a:t>
+            </a:r>
+            <a:endParaRPr kumimoji="1" lang="ja-JP" altLang="en-US" dirty="0"/>
+          </a:p>
+        </p:txBody>
+      </p:sp>
+      <p:pic>
+        <p:nvPicPr>
+          <p:cNvPr id="9" name="図 8">
+            <a:extLst>
+              <a:ext uri="{FF2B5EF4-FFF2-40B4-BE49-F238E27FC236}">
+                <a16:creationId xmlns:a16="http://schemas.microsoft.com/office/drawing/2014/main" id="{EC5CE143-6947-4793-7746-D476ED916887}"/>
+              </a:ext>
+            </a:extLst>
+          </p:cNvPr>
+          <p:cNvPicPr>
+            <a:picLocks noChangeAspect="1"/>
+          </p:cNvPicPr>
+          <p:nvPr/>
+        </p:nvPicPr>
+        <p:blipFill>
+          <a:blip r:embed="rId2"/>
+          <a:srcRect t="5799"/>
+          <a:stretch>
+            <a:fillRect/>
+          </a:stretch>
+        </p:blipFill>
+        <p:spPr>
+          <a:xfrm>
+            <a:off x="154379" y="380948"/>
+            <a:ext cx="6544683" cy="5432945"/>
+          </a:xfrm>
+          <a:prstGeom prst="rect">
+            <a:avLst/>
+          </a:prstGeom>
+        </p:spPr>
+      </p:pic>
+      <p:sp>
+        <p:nvSpPr>
+          <p:cNvPr id="11" name="テキスト ボックス 10">
+            <a:extLst>
+              <a:ext uri="{FF2B5EF4-FFF2-40B4-BE49-F238E27FC236}">
+                <a16:creationId xmlns:a16="http://schemas.microsoft.com/office/drawing/2014/main" id="{D6FBB018-D0A0-4077-C809-15E1010827A5}"/>
+              </a:ext>
+            </a:extLst>
+          </p:cNvPr>
+          <p:cNvSpPr txBox="1"/>
+          <p:nvPr/>
+        </p:nvSpPr>
+        <p:spPr>
+          <a:xfrm>
+            <a:off x="2006600" y="4033803"/>
+            <a:ext cx="7797799" cy="2677656"/>
+          </a:xfrm>
+          <a:prstGeom prst="rect">
+            <a:avLst/>
+          </a:prstGeom>
+          <a:solidFill>
+            <a:schemeClr val="accent6">
+              <a:lumMod val="20000"/>
+              <a:lumOff val="80000"/>
+            </a:schemeClr>
+          </a:solidFill>
+          <a:ln>
+            <a:solidFill>
+              <a:schemeClr val="bg2">
+                <a:lumMod val="90000"/>
+              </a:schemeClr>
+            </a:solidFill>
+          </a:ln>
+        </p:spPr>
+        <p:txBody>
+          <a:bodyPr wrap="square" rtlCol="0">
+            <a:spAutoFit/>
+          </a:bodyPr>
+          <a:lstStyle/>
+          <a:p>
+            <a:pPr lvl="0"/>
+            <a:r>
+              <a:rPr lang="ja-JP" altLang="ja-JP" sz="1400" dirty="0">
+                <a:latin typeface="メイリオ" panose="020B0604030504040204" pitchFamily="50" charset="-128"/>
+                <a:ea typeface="メイリオ" panose="020B0604030504040204" pitchFamily="50" charset="-128"/>
+              </a:rPr>
+              <a:t>患者からのキャンセルや、スタッフによる対応打ち切りなど、フローが中断された場合の処理をまとめたブロックです。</a:t>
+            </a:r>
+          </a:p>
+          <a:p>
+            <a:pPr lvl="0"/>
+            <a:endParaRPr lang="en-US" altLang="ja-JP" sz="1400" b="1" dirty="0">
+              <a:latin typeface="メイリオ" panose="020B0604030504040204" pitchFamily="50" charset="-128"/>
+              <a:ea typeface="メイリオ" panose="020B0604030504040204" pitchFamily="50" charset="-128"/>
+            </a:endParaRPr>
+          </a:p>
+          <a:p>
+            <a:pPr lvl="0"/>
+            <a:r>
+              <a:rPr lang="ja-JP" altLang="ja-JP" sz="1400" b="1" dirty="0">
+                <a:latin typeface="メイリオ" panose="020B0604030504040204" pitchFamily="50" charset="-128"/>
+                <a:ea typeface="メイリオ" panose="020B0604030504040204" pitchFamily="50" charset="-128"/>
+              </a:rPr>
+              <a:t>各種取下と強制終了</a:t>
+            </a:r>
+            <a:r>
+              <a:rPr lang="ja-JP" altLang="ja-JP" sz="1400" dirty="0">
+                <a:latin typeface="メイリオ" panose="020B0604030504040204" pitchFamily="50" charset="-128"/>
+                <a:ea typeface="メイリオ" panose="020B0604030504040204" pitchFamily="50" charset="-128"/>
+              </a:rPr>
+              <a:t> </a:t>
+            </a:r>
+            <a:endParaRPr lang="en-US" altLang="ja-JP" sz="1400" dirty="0">
+              <a:latin typeface="メイリオ" panose="020B0604030504040204" pitchFamily="50" charset="-128"/>
+              <a:ea typeface="メイリオ" panose="020B0604030504040204" pitchFamily="50" charset="-128"/>
+            </a:endParaRPr>
+          </a:p>
+          <a:p>
+            <a:pPr lvl="0"/>
+            <a:r>
+              <a:rPr lang="ja-JP" altLang="ja-JP" sz="1400" dirty="0">
+                <a:latin typeface="メイリオ" panose="020B0604030504040204" pitchFamily="50" charset="-128"/>
+                <a:ea typeface="メイリオ" panose="020B0604030504040204" pitchFamily="50" charset="-128"/>
+              </a:rPr>
+              <a:t>「URL取下」「WEB取下」「強制終了」は、システムからの自動キャンセルや対応打ち切りにより発生します。これらは復帰できず、【完了・評価】ブロックへ進みそのままクローズされます。</a:t>
+            </a:r>
+          </a:p>
+          <a:p>
+            <a:pPr lvl="0"/>
+            <a:endParaRPr lang="en-US" altLang="ja-JP" sz="1400" b="1" dirty="0">
+              <a:latin typeface="メイリオ" panose="020B0604030504040204" pitchFamily="50" charset="-128"/>
+              <a:ea typeface="メイリオ" panose="020B0604030504040204" pitchFamily="50" charset="-128"/>
+            </a:endParaRPr>
+          </a:p>
+          <a:p>
+            <a:pPr lvl="0"/>
+            <a:r>
+              <a:rPr lang="ja-JP" altLang="ja-JP" sz="1400" b="1" dirty="0">
+                <a:latin typeface="メイリオ" panose="020B0604030504040204" pitchFamily="50" charset="-128"/>
+                <a:ea typeface="メイリオ" panose="020B0604030504040204" pitchFamily="50" charset="-128"/>
+              </a:rPr>
+              <a:t>取下中止（復活）</a:t>
+            </a:r>
+            <a:r>
+              <a:rPr lang="ja-JP" altLang="ja-JP" sz="1400" dirty="0">
+                <a:latin typeface="メイリオ" panose="020B0604030504040204" pitchFamily="50" charset="-128"/>
+                <a:ea typeface="メイリオ" panose="020B0604030504040204" pitchFamily="50" charset="-128"/>
+              </a:rPr>
+              <a:t> </a:t>
+            </a:r>
+            <a:endParaRPr lang="en-US" altLang="ja-JP" sz="1400" dirty="0">
+              <a:latin typeface="メイリオ" panose="020B0604030504040204" pitchFamily="50" charset="-128"/>
+              <a:ea typeface="メイリオ" panose="020B0604030504040204" pitchFamily="50" charset="-128"/>
+            </a:endParaRPr>
+          </a:p>
+          <a:p>
+            <a:pPr lvl="0"/>
+            <a:r>
+              <a:rPr lang="ja-JP" altLang="ja-JP" sz="1400" dirty="0">
+                <a:latin typeface="メイリオ" panose="020B0604030504040204" pitchFamily="50" charset="-128"/>
+                <a:ea typeface="メイリオ" panose="020B0604030504040204" pitchFamily="50" charset="-128"/>
+              </a:rPr>
+              <a:t>スタッフが手動でキャンセル処理を行った「スタッフ取下」に限り、誤操作等の救済措置として「取下を中止して復活」アクションが可能です。この場合【受付・初期設定】ブロックへワープし、元の状態へ復帰します。</a:t>
+            </a:r>
+          </a:p>
+        </p:txBody>
+      </p:sp>
+    </p:spTree>
+    <p:extLst>
+      <p:ext uri="{BB962C8B-B14F-4D97-AF65-F5344CB8AC3E}">
+        <p14:creationId xmlns:p14="http://schemas.microsoft.com/office/powerpoint/2010/main" val="1784044220"/>
+      </p:ext>
+    </p:extLst>
+  </p:cSld>
+  <p:clrMapOvr>
+    <a:masterClrMapping/>
+  </p:clrMapOvr>
+</p:sld>
+</file>
+
+<file path=ppt/slides/slide18.xml><?xml version="1.0" encoding="utf-8"?>
 <p:sld xmlns:a="http://schemas.openxmlformats.org/drawingml/2006/main" xmlns:r="http://schemas.openxmlformats.org/officeDocument/2006/relationships" xmlns:p="http://schemas.openxmlformats.org/presentationml/2006/main">
   <p:cSld>
     <p:spTree>
@@ -3440,462 +4136,6 @@
 </p:sld>
 </file>
 
-<file path=ppt/slides/slide16.xml><?xml version="1.0" encoding="utf-8"?>
-<p:sld xmlns:a="http://schemas.openxmlformats.org/drawingml/2006/main" xmlns:r="http://schemas.openxmlformats.org/officeDocument/2006/relationships" xmlns:p="http://schemas.openxmlformats.org/presentationml/2006/main">
-  <p:cSld>
-    <p:spTree>
-      <p:nvGrpSpPr>
-        <p:cNvPr id="1" name=""/>
-        <p:cNvGrpSpPr/>
-        <p:nvPr/>
-      </p:nvGrpSpPr>
-      <p:grpSpPr>
-        <a:xfrm>
-          <a:off x="0" y="0"/>
-          <a:ext cx="0" cy="0"/>
-          <a:chOff x="0" y="0"/>
-          <a:chExt cx="0" cy="0"/>
-        </a:xfrm>
-      </p:grpSpPr>
-      <p:sp>
-        <p:nvSpPr>
-          <p:cNvPr id="2" name="タイトル 1">
-            <a:extLst>
-              <a:ext uri="{FF2B5EF4-FFF2-40B4-BE49-F238E27FC236}">
-                <a16:creationId xmlns:a16="http://schemas.microsoft.com/office/drawing/2014/main" id="{B9C2226F-4205-B91D-E62A-350BB1796C3A}"/>
-              </a:ext>
-            </a:extLst>
-          </p:cNvPr>
-          <p:cNvSpPr>
-            <a:spLocks noGrp="1"/>
-          </p:cNvSpPr>
-          <p:nvPr>
-            <p:ph type="title"/>
-          </p:nvPr>
-        </p:nvSpPr>
-        <p:spPr/>
-        <p:txBody>
-          <a:bodyPr/>
-          <a:lstStyle/>
-          <a:p>
-            <a:r>
-              <a:rPr kumimoji="1" lang="ja-JP" altLang="en-US" dirty="0"/>
-              <a:t>取り下げ処理</a:t>
-            </a:r>
-          </a:p>
-        </p:txBody>
-      </p:sp>
-      <p:sp>
-        <p:nvSpPr>
-          <p:cNvPr id="3" name="コンテンツ プレースホルダー 2">
-            <a:extLst>
-              <a:ext uri="{FF2B5EF4-FFF2-40B4-BE49-F238E27FC236}">
-                <a16:creationId xmlns:a16="http://schemas.microsoft.com/office/drawing/2014/main" id="{63F90ABB-7FBC-7BC3-7F27-96CC0E41B464}"/>
-              </a:ext>
-            </a:extLst>
-          </p:cNvPr>
-          <p:cNvSpPr>
-            <a:spLocks noGrp="1"/>
-          </p:cNvSpPr>
-          <p:nvPr>
-            <p:ph idx="1"/>
-          </p:nvPr>
-        </p:nvSpPr>
-        <p:spPr/>
-        <p:txBody>
-          <a:bodyPr/>
-          <a:lstStyle/>
-          <a:p>
-            <a:endParaRPr kumimoji="1" lang="ja-JP" altLang="en-US"/>
-          </a:p>
-        </p:txBody>
-      </p:sp>
-    </p:spTree>
-    <p:extLst>
-      <p:ext uri="{BB962C8B-B14F-4D97-AF65-F5344CB8AC3E}">
-        <p14:creationId xmlns:p14="http://schemas.microsoft.com/office/powerpoint/2010/main" val="2975413030"/>
-      </p:ext>
-    </p:extLst>
-  </p:cSld>
-  <p:clrMapOvr>
-    <a:masterClrMapping/>
-  </p:clrMapOvr>
-</p:sld>
-</file>
-
-<file path=ppt/slides/slide17.xml><?xml version="1.0" encoding="utf-8"?>
-<p:sld xmlns:a="http://schemas.openxmlformats.org/drawingml/2006/main" xmlns:r="http://schemas.openxmlformats.org/officeDocument/2006/relationships" xmlns:p="http://schemas.openxmlformats.org/presentationml/2006/main">
-  <p:cSld>
-    <p:spTree>
-      <p:nvGrpSpPr>
-        <p:cNvPr id="1" name=""/>
-        <p:cNvGrpSpPr/>
-        <p:nvPr/>
-      </p:nvGrpSpPr>
-      <p:grpSpPr>
-        <a:xfrm>
-          <a:off x="0" y="0"/>
-          <a:ext cx="0" cy="0"/>
-          <a:chOff x="0" y="0"/>
-          <a:chExt cx="0" cy="0"/>
-        </a:xfrm>
-      </p:grpSpPr>
-      <p:sp>
-        <p:nvSpPr>
-          <p:cNvPr id="2" name="タイトル 1">
-            <a:extLst>
-              <a:ext uri="{FF2B5EF4-FFF2-40B4-BE49-F238E27FC236}">
-                <a16:creationId xmlns:a16="http://schemas.microsoft.com/office/drawing/2014/main" id="{4D3B0A94-FC39-DF97-69A5-BAC9D6B345D4}"/>
-              </a:ext>
-            </a:extLst>
-          </p:cNvPr>
-          <p:cNvSpPr>
-            <a:spLocks noGrp="1"/>
-          </p:cNvSpPr>
-          <p:nvPr>
-            <p:ph type="title"/>
-          </p:nvPr>
-        </p:nvSpPr>
-        <p:spPr/>
-        <p:txBody>
-          <a:bodyPr/>
-          <a:lstStyle/>
-          <a:p>
-            <a:r>
-              <a:rPr kumimoji="1" lang="ja-JP" altLang="en-US" dirty="0"/>
-              <a:t>メール対応から電話対応へ切り替える</a:t>
-            </a:r>
-          </a:p>
-        </p:txBody>
-      </p:sp>
-      <p:sp>
-        <p:nvSpPr>
-          <p:cNvPr id="3" name="コンテンツ プレースホルダー 2">
-            <a:extLst>
-              <a:ext uri="{FF2B5EF4-FFF2-40B4-BE49-F238E27FC236}">
-                <a16:creationId xmlns:a16="http://schemas.microsoft.com/office/drawing/2014/main" id="{816379A2-7773-7146-839F-B95E220BB506}"/>
-              </a:ext>
-            </a:extLst>
-          </p:cNvPr>
-          <p:cNvSpPr>
-            <a:spLocks noGrp="1"/>
-          </p:cNvSpPr>
-          <p:nvPr>
-            <p:ph idx="1"/>
-          </p:nvPr>
-        </p:nvSpPr>
-        <p:spPr/>
-        <p:txBody>
-          <a:bodyPr/>
-          <a:lstStyle/>
-          <a:p>
-            <a:endParaRPr kumimoji="1" lang="ja-JP" altLang="en-US" dirty="0"/>
-          </a:p>
-        </p:txBody>
-      </p:sp>
-    </p:spTree>
-    <p:extLst>
-      <p:ext uri="{BB962C8B-B14F-4D97-AF65-F5344CB8AC3E}">
-        <p14:creationId xmlns:p14="http://schemas.microsoft.com/office/powerpoint/2010/main" val="1658377675"/>
-      </p:ext>
-    </p:extLst>
-  </p:cSld>
-  <p:clrMapOvr>
-    <a:masterClrMapping/>
-  </p:clrMapOvr>
-</p:sld>
-</file>
-
-<file path=ppt/slides/slide18.xml><?xml version="1.0" encoding="utf-8"?>
-<p:sld xmlns:a="http://schemas.openxmlformats.org/drawingml/2006/main" xmlns:r="http://schemas.openxmlformats.org/officeDocument/2006/relationships" xmlns:p="http://schemas.openxmlformats.org/presentationml/2006/main">
-  <p:cSld>
-    <p:spTree>
-      <p:nvGrpSpPr>
-        <p:cNvPr id="1" name=""/>
-        <p:cNvGrpSpPr/>
-        <p:nvPr/>
-      </p:nvGrpSpPr>
-      <p:grpSpPr>
-        <a:xfrm>
-          <a:off x="0" y="0"/>
-          <a:ext cx="0" cy="0"/>
-          <a:chOff x="0" y="0"/>
-          <a:chExt cx="0" cy="0"/>
-        </a:xfrm>
-      </p:grpSpPr>
-      <p:sp>
-        <p:nvSpPr>
-          <p:cNvPr id="2" name="タイトル 1">
-            <a:extLst>
-              <a:ext uri="{FF2B5EF4-FFF2-40B4-BE49-F238E27FC236}">
-                <a16:creationId xmlns:a16="http://schemas.microsoft.com/office/drawing/2014/main" id="{D6665F36-22B9-72D6-EF8E-E5684086E147}"/>
-              </a:ext>
-            </a:extLst>
-          </p:cNvPr>
-          <p:cNvSpPr>
-            <a:spLocks noGrp="1"/>
-          </p:cNvSpPr>
-          <p:nvPr>
-            <p:ph type="title"/>
-          </p:nvPr>
-        </p:nvSpPr>
-        <p:spPr/>
-        <p:txBody>
-          <a:bodyPr/>
-          <a:lstStyle/>
-          <a:p>
-            <a:r>
-              <a:rPr kumimoji="1" lang="ja-JP" altLang="en-US" dirty="0"/>
-              <a:t>仮予約という概念</a:t>
-            </a:r>
-          </a:p>
-        </p:txBody>
-      </p:sp>
-      <p:sp>
-        <p:nvSpPr>
-          <p:cNvPr id="3" name="コンテンツ プレースホルダー 2">
-            <a:extLst>
-              <a:ext uri="{FF2B5EF4-FFF2-40B4-BE49-F238E27FC236}">
-                <a16:creationId xmlns:a16="http://schemas.microsoft.com/office/drawing/2014/main" id="{A1525CDE-83E0-5985-8F57-E878CEF67F1E}"/>
-              </a:ext>
-            </a:extLst>
-          </p:cNvPr>
-          <p:cNvSpPr>
-            <a:spLocks noGrp="1"/>
-          </p:cNvSpPr>
-          <p:nvPr>
-            <p:ph idx="1"/>
-          </p:nvPr>
-        </p:nvSpPr>
-        <p:spPr/>
-        <p:txBody>
-          <a:bodyPr/>
-          <a:lstStyle/>
-          <a:p>
-            <a:pPr marL="0" indent="0">
-              <a:buNone/>
-            </a:pPr>
-            <a:r>
-              <a:rPr lang="ja-JP" altLang="en-US" dirty="0"/>
-              <a:t>本システムでは以下のように従来の①に加えて②、③の方法が拡張されます。</a:t>
-            </a:r>
-            <a:endParaRPr lang="en-US" altLang="ja-JP" dirty="0"/>
-          </a:p>
-          <a:p>
-            <a:pPr marL="0" indent="0">
-              <a:buNone/>
-            </a:pPr>
-            <a:r>
-              <a:rPr lang="ja-JP" altLang="en-US" dirty="0"/>
-              <a:t>①患者から電話予約</a:t>
-            </a:r>
-            <a:endParaRPr lang="en-US" altLang="ja-JP" dirty="0"/>
-          </a:p>
-          <a:p>
-            <a:pPr marL="0" indent="0">
-              <a:buNone/>
-            </a:pPr>
-            <a:r>
-              <a:rPr lang="ja-JP" altLang="en-US" dirty="0"/>
-              <a:t>②</a:t>
-            </a:r>
-            <a:r>
-              <a:rPr lang="en-US" altLang="ja-JP" dirty="0"/>
-              <a:t>Web</a:t>
-            </a:r>
-            <a:r>
-              <a:rPr lang="ja-JP" altLang="en-US" dirty="0"/>
-              <a:t>フォーム　＆メール対応</a:t>
-            </a:r>
-            <a:endParaRPr lang="en-US" altLang="ja-JP" dirty="0"/>
-          </a:p>
-          <a:p>
-            <a:pPr marL="0" indent="0">
-              <a:buNone/>
-            </a:pPr>
-            <a:r>
-              <a:rPr lang="ja-JP" altLang="en-US" dirty="0"/>
-              <a:t>③</a:t>
-            </a:r>
-            <a:r>
-              <a:rPr lang="en-US" altLang="ja-JP" dirty="0"/>
-              <a:t>Web</a:t>
-            </a:r>
-            <a:r>
-              <a:rPr lang="ja-JP" altLang="en-US" dirty="0"/>
-              <a:t>フォーム　＆電話対応</a:t>
-            </a:r>
-            <a:endParaRPr lang="en-US" altLang="ja-JP" dirty="0"/>
-          </a:p>
-          <a:p>
-            <a:pPr marL="0" indent="0">
-              <a:buNone/>
-            </a:pPr>
-            <a:endParaRPr lang="en-US" altLang="ja-JP" dirty="0"/>
-          </a:p>
-          <a:p>
-            <a:pPr marL="0" indent="0">
-              <a:buNone/>
-            </a:pPr>
-            <a:r>
-              <a:rPr lang="ja-JP" altLang="en-US" dirty="0"/>
-              <a:t>②、③は以下を考慮すると予約確定するまでには時差が生じるため</a:t>
-            </a:r>
-            <a:endParaRPr lang="en-US" altLang="ja-JP" dirty="0"/>
-          </a:p>
-          <a:p>
-            <a:pPr marL="0" indent="0">
-              <a:buNone/>
-            </a:pPr>
-            <a:r>
-              <a:rPr lang="ja-JP" altLang="en-US" dirty="0"/>
-              <a:t>仮予約日時の概念を導入する必要があります。</a:t>
-            </a:r>
-            <a:endParaRPr lang="en-US" altLang="ja-JP" dirty="0"/>
-          </a:p>
-          <a:p>
-            <a:pPr marL="0" indent="0">
-              <a:buNone/>
-            </a:pPr>
-            <a:endParaRPr lang="en-US" altLang="ja-JP" dirty="0"/>
-          </a:p>
-          <a:p>
-            <a:pPr marL="0" indent="0">
-              <a:buNone/>
-            </a:pPr>
-            <a:r>
-              <a:rPr lang="ja-JP" altLang="en-US" dirty="0"/>
-              <a:t>・予約日時を記した案内メールを患者が読んでいない</a:t>
-            </a:r>
-            <a:endParaRPr lang="en-US" altLang="ja-JP" dirty="0"/>
-          </a:p>
-          <a:p>
-            <a:pPr marL="457200" lvl="1" indent="0">
-              <a:buNone/>
-            </a:pPr>
-            <a:r>
-              <a:rPr lang="ja-JP" altLang="en-US" sz="1000" dirty="0"/>
-              <a:t>　</a:t>
-            </a:r>
-            <a:r>
-              <a:rPr lang="en-US" altLang="ja-JP" sz="1000" dirty="0"/>
-              <a:t>A</a:t>
-            </a:r>
-            <a:r>
-              <a:rPr lang="ja-JP" altLang="en-US" sz="1000" dirty="0"/>
-              <a:t>忙しいのですぐには見れてない。時間が要因</a:t>
-            </a:r>
-            <a:endParaRPr lang="en-US" altLang="ja-JP" sz="1000" dirty="0"/>
-          </a:p>
-          <a:p>
-            <a:pPr marL="457200" lvl="1" indent="0">
-              <a:buNone/>
-            </a:pPr>
-            <a:r>
-              <a:rPr lang="ja-JP" altLang="en-US" sz="1000" dirty="0"/>
-              <a:t>　</a:t>
-            </a:r>
-            <a:r>
-              <a:rPr lang="en-US" altLang="ja-JP" sz="1000" dirty="0"/>
-              <a:t>B</a:t>
-            </a:r>
-            <a:r>
-              <a:rPr lang="ja-JP" altLang="en-US" sz="1000" dirty="0"/>
-              <a:t>メールが不慣れで見れていない。スキルが要因</a:t>
-            </a:r>
-            <a:endParaRPr lang="en-US" altLang="ja-JP" sz="1000" dirty="0"/>
-          </a:p>
-          <a:p>
-            <a:pPr marL="457200" lvl="1" indent="0">
-              <a:buNone/>
-            </a:pPr>
-            <a:r>
-              <a:rPr lang="ja-JP" altLang="en-US" sz="1000" dirty="0"/>
-              <a:t>　</a:t>
-            </a:r>
-            <a:r>
-              <a:rPr lang="en-US" altLang="ja-JP" sz="1000" dirty="0"/>
-              <a:t>C</a:t>
-            </a:r>
-            <a:r>
-              <a:rPr lang="ja-JP" altLang="en-US" sz="1000" dirty="0"/>
-              <a:t>迷惑メールフォルダーに入って見れていない。環境が要因</a:t>
-            </a:r>
-            <a:endParaRPr lang="en-US" altLang="ja-JP" sz="1000" dirty="0"/>
-          </a:p>
-          <a:p>
-            <a:pPr marL="457200" lvl="1" indent="0">
-              <a:buNone/>
-            </a:pPr>
-            <a:r>
-              <a:rPr lang="en-US" altLang="ja-JP" sz="1000" dirty="0"/>
-              <a:t>A</a:t>
-            </a:r>
-            <a:r>
-              <a:rPr lang="ja-JP" altLang="en-US" sz="1000" dirty="0"/>
-              <a:t>は待ち時間（猶予）が必要ですが、</a:t>
-            </a:r>
-            <a:r>
-              <a:rPr lang="en-US" altLang="ja-JP" sz="1000" dirty="0"/>
-              <a:t>B,C</a:t>
-            </a:r>
-            <a:r>
-              <a:rPr lang="ja-JP" altLang="en-US" sz="1000" dirty="0"/>
-              <a:t>はいくら待っても期待できません。</a:t>
-            </a:r>
-            <a:endParaRPr lang="en-US" altLang="ja-JP" sz="1000" dirty="0"/>
-          </a:p>
-          <a:p>
-            <a:pPr marL="0" indent="0">
-              <a:buNone/>
-            </a:pPr>
-            <a:r>
-              <a:rPr lang="ja-JP" altLang="en-US" dirty="0"/>
-              <a:t>・今なら空き枠があったのに電話してもなかなか繫がらない</a:t>
-            </a:r>
-            <a:endParaRPr lang="en-US" altLang="ja-JP" dirty="0"/>
-          </a:p>
-          <a:p>
-            <a:pPr marL="0" indent="0">
-              <a:buNone/>
-            </a:pPr>
-            <a:endParaRPr lang="en-US" altLang="ja-JP" dirty="0"/>
-          </a:p>
-          <a:p>
-            <a:pPr marL="0" indent="0">
-              <a:buNone/>
-            </a:pPr>
-            <a:r>
-              <a:rPr lang="ja-JP" altLang="en-US" dirty="0"/>
-              <a:t>単に案内メールを送り付けただけで予約確定とみなすのはトラブルに至るリスクが非常に高いため、予約日時情報の既読検出処理を導入しています。</a:t>
-            </a:r>
-            <a:endParaRPr lang="en-US" altLang="ja-JP" dirty="0"/>
-          </a:p>
-          <a:p>
-            <a:pPr marL="0" indent="0">
-              <a:buNone/>
-            </a:pPr>
-            <a:r>
-              <a:rPr lang="ja-JP" altLang="en-US" dirty="0"/>
-              <a:t>患者自身が予約日時方法にアクセスする明示的な操作を行うかを検出します。</a:t>
-            </a:r>
-            <a:endParaRPr lang="en-US" altLang="ja-JP" dirty="0"/>
-          </a:p>
-        </p:txBody>
-      </p:sp>
-    </p:spTree>
-    <p:extLst>
-      <p:ext uri="{BB962C8B-B14F-4D97-AF65-F5344CB8AC3E}">
-        <p14:creationId xmlns:p14="http://schemas.microsoft.com/office/powerpoint/2010/main" val="3993378393"/>
-      </p:ext>
-    </p:extLst>
-  </p:cSld>
-  <p:clrMapOvr>
-    <a:masterClrMapping/>
-  </p:clrMapOvr>
-</p:sld>
-</file>
-
 <file path=ppt/slides/slide19.xml><?xml version="1.0" encoding="utf-8"?>
 <p:sld xmlns:a="http://schemas.openxmlformats.org/drawingml/2006/main" xmlns:r="http://schemas.openxmlformats.org/officeDocument/2006/relationships" xmlns:p="http://schemas.openxmlformats.org/presentationml/2006/main">
   <p:cSld>
@@ -3918,7 +4158,7 @@
           <p:cNvPr id="2" name="タイトル 1">
             <a:extLst>
               <a:ext uri="{FF2B5EF4-FFF2-40B4-BE49-F238E27FC236}">
-                <a16:creationId xmlns:a16="http://schemas.microsoft.com/office/drawing/2014/main" id="{CB718237-8642-2A70-A048-6A4FC7B0622D}"/>
+                <a16:creationId xmlns:a16="http://schemas.microsoft.com/office/drawing/2014/main" id="{15D0E301-D6B1-2149-3E4F-0251CD0EBBF5}"/>
               </a:ext>
             </a:extLst>
           </p:cNvPr>
@@ -3935,9 +4175,14 @@
           <a:lstStyle/>
           <a:p>
             <a:r>
-              <a:rPr kumimoji="1" lang="ja-JP" altLang="en-US" dirty="0"/>
-              <a:t>患者がちゃんと予定通り診療を受けたかも管理</a:t>
-            </a:r>
+              <a:rPr lang="en-US" altLang="ja-JP" dirty="0"/>
+              <a:t>CRM(Customer Relation Management)</a:t>
+            </a:r>
+            <a:r>
+              <a:rPr kumimoji="1" lang="en-US" altLang="ja-JP" dirty="0"/>
+              <a:t>	</a:t>
+            </a:r>
+            <a:endParaRPr kumimoji="1" lang="ja-JP" altLang="en-US" dirty="0"/>
           </a:p>
         </p:txBody>
       </p:sp>
@@ -3946,7 +4191,7 @@
           <p:cNvPr id="3" name="コンテンツ プレースホルダー 2">
             <a:extLst>
               <a:ext uri="{FF2B5EF4-FFF2-40B4-BE49-F238E27FC236}">
-                <a16:creationId xmlns:a16="http://schemas.microsoft.com/office/drawing/2014/main" id="{A1AACB16-0B22-178F-D606-17490FDE16C7}"/>
+                <a16:creationId xmlns:a16="http://schemas.microsoft.com/office/drawing/2014/main" id="{3AD05A2C-0B51-4FBD-1892-3806B1807CD6}"/>
               </a:ext>
             </a:extLst>
           </p:cNvPr>
@@ -3964,57 +4209,199 @@
           <a:p>
             <a:r>
               <a:rPr kumimoji="1" lang="ja-JP" altLang="en-US" dirty="0"/>
-              <a:t>患者が予約日時通りに診察を受けたかどうかを電子カルテ側の情報などをもとに確認してチケットを終了させる必要があります。</a:t>
-            </a:r>
-            <a:endParaRPr kumimoji="1" lang="en-US" altLang="ja-JP" dirty="0"/>
-          </a:p>
-          <a:p>
-            <a:r>
-              <a:rPr lang="ja-JP" altLang="en-US" dirty="0"/>
-              <a:t>実際</a:t>
-            </a:r>
-            <a:r>
-              <a:rPr kumimoji="1" lang="ja-JP" altLang="en-US" dirty="0"/>
-              <a:t>に対象患者が予定通り問題なく受診されたのかという情報も次回の</a:t>
-            </a:r>
-            <a:r>
-              <a:rPr lang="ja-JP" altLang="en-US" dirty="0"/>
-              <a:t>対応方法として有用な</a:t>
-            </a:r>
-            <a:r>
-              <a:rPr kumimoji="1" lang="ja-JP" altLang="en-US" dirty="0"/>
-              <a:t>ので</a:t>
+              <a:t>本システムは</a:t>
             </a:r>
             <a:r>
               <a:rPr kumimoji="1" lang="en-US" altLang="ja-JP" dirty="0"/>
               <a:t>CRM</a:t>
             </a:r>
             <a:r>
+              <a:rPr lang="ja-JP" altLang="en-US" dirty="0"/>
+              <a:t>機能を有しており、</a:t>
+            </a:r>
+            <a:r>
               <a:rPr kumimoji="1" lang="ja-JP" altLang="en-US" dirty="0"/>
-              <a:t>に残すようにします。</a:t>
+              <a:t>、</a:t>
+            </a:r>
+            <a:r>
+              <a:rPr kumimoji="1" lang="en-US" altLang="ja-JP" dirty="0"/>
+              <a:t>Web</a:t>
+            </a:r>
+            <a:r>
+              <a:rPr kumimoji="1" lang="ja-JP" altLang="en-US" dirty="0"/>
+              <a:t>フォームから寄せられた依頼に始まり、診療が終了する有効期間が過ぎた後、次回</a:t>
+            </a:r>
+            <a:r>
+              <a:rPr lang="ja-JP" altLang="en-US" dirty="0"/>
+              <a:t>同一患者からの</a:t>
+            </a:r>
+            <a:r>
+              <a:rPr kumimoji="1" lang="ja-JP" altLang="en-US" dirty="0"/>
+              <a:t>予約があったときの対応方法</a:t>
+            </a:r>
+            <a:r>
+              <a:rPr lang="ja-JP" altLang="en-US" dirty="0"/>
+              <a:t>の参考とするために</a:t>
+            </a:r>
+            <a:r>
+              <a:rPr kumimoji="1" lang="ja-JP" altLang="en-US" dirty="0"/>
+              <a:t>、スタッフが特定の管理状況に遷移したときに</a:t>
+            </a:r>
+            <a:r>
+              <a:rPr lang="ja-JP" altLang="en-US" dirty="0"/>
+              <a:t>チェックボックス、メモからなるダイアログが現れて</a:t>
+            </a:r>
+            <a:r>
+              <a:rPr kumimoji="1" lang="ja-JP" altLang="en-US" dirty="0"/>
+              <a:t>患者の特徴を残すことができるようになっています。</a:t>
             </a:r>
             <a:endParaRPr kumimoji="1" lang="en-US" altLang="ja-JP" dirty="0"/>
           </a:p>
           <a:p>
             <a:r>
+              <a:rPr lang="ja-JP" altLang="en-US" dirty="0"/>
+              <a:t>特に電話対応があった場合には、会話を通じてより相手の特徴が把握できるので、今後の対応時に有用な情報があれば残すようにしましょう。</a:t>
+            </a:r>
+            <a:endParaRPr lang="en-US" altLang="ja-JP" dirty="0"/>
+          </a:p>
+          <a:p>
+            <a:r>
               <a:rPr kumimoji="1" lang="ja-JP" altLang="en-US" dirty="0"/>
-              <a:t>予約日時通りに診療が</a:t>
+              <a:t>本</a:t>
+            </a:r>
+            <a:r>
+              <a:rPr kumimoji="1" lang="en-US" altLang="ja-JP" dirty="0"/>
+              <a:t>Web</a:t>
+            </a:r>
+            <a:r>
+              <a:rPr kumimoji="1" lang="ja-JP" altLang="en-US" dirty="0"/>
+              <a:t>フォームを</a:t>
+            </a:r>
+            <a:r>
+              <a:rPr kumimoji="1" lang="en-US" altLang="ja-JP" dirty="0"/>
+              <a:t>1</a:t>
+            </a:r>
+            <a:r>
+              <a:rPr kumimoji="1" lang="ja-JP" altLang="en-US" dirty="0"/>
+              <a:t>回以上利用した患者であれば、次回、</a:t>
+            </a:r>
+            <a:r>
+              <a:rPr kumimoji="1" lang="en-US" altLang="ja-JP" dirty="0"/>
+              <a:t>Web</a:t>
+            </a:r>
+            <a:r>
+              <a:rPr kumimoji="1" lang="ja-JP" altLang="en-US" dirty="0"/>
+              <a:t>フォーム上で、カルテ</a:t>
+            </a:r>
+            <a:r>
+              <a:rPr lang="en-US" altLang="ja-JP" dirty="0"/>
+              <a:t>No</a:t>
             </a:r>
             <a:r>
               <a:rPr lang="ja-JP" altLang="en-US" dirty="0"/>
-              <a:t>進行</a:t>
+              <a:t>と誕生日の照合を経て患者の住所や氏名などの情報の</a:t>
             </a:r>
             <a:r>
               <a:rPr kumimoji="1" lang="ja-JP" altLang="en-US" dirty="0"/>
-              <a:t>しないことがあるため、この終了判定は診療日の翌日に問われるようになっています（翌日になるとチケットは自動的に評価待ちとなります）</a:t>
-            </a:r>
+              <a:t>自動入力アシストが働くため、次回以降は患者の入力の手間が軽減されます。</a:t>
+            </a:r>
+            <a:endParaRPr kumimoji="1" lang="en-US" altLang="ja-JP" dirty="0"/>
+          </a:p>
+          <a:p>
+            <a:r>
+              <a:rPr lang="ja-JP" altLang="en-US" dirty="0"/>
+              <a:t>ご注意：</a:t>
+            </a:r>
+            <a:r>
+              <a:rPr kumimoji="1" lang="ja-JP" altLang="en-US" dirty="0"/>
+              <a:t>本</a:t>
+            </a:r>
+            <a:r>
+              <a:rPr kumimoji="1" lang="en-US" altLang="ja-JP" dirty="0"/>
+              <a:t>CRM</a:t>
+            </a:r>
+            <a:r>
+              <a:rPr kumimoji="1" lang="ja-JP" altLang="en-US" dirty="0"/>
+              <a:t>は</a:t>
+            </a:r>
+            <a:r>
+              <a:rPr kumimoji="1" lang="en-US" altLang="ja-JP" dirty="0"/>
+              <a:t>Web</a:t>
+            </a:r>
+            <a:r>
+              <a:rPr kumimoji="1" lang="ja-JP" altLang="en-US" dirty="0"/>
+              <a:t>フォームを使わない従来の電話依頼による予約処理や、診療現場で医師が患者と会話で次回の予約を入れた場合などは</a:t>
+            </a:r>
+            <a:r>
+              <a:rPr lang="ja-JP" altLang="en-US" dirty="0"/>
+              <a:t>対象外となります。</a:t>
+            </a:r>
+            <a:endParaRPr kumimoji="1" lang="en-US" altLang="ja-JP" dirty="0"/>
+          </a:p>
+          <a:p>
+            <a:pPr marL="0" indent="0">
+              <a:buNone/>
+            </a:pPr>
+            <a:r>
+              <a:rPr kumimoji="1" lang="ja-JP" altLang="en-US" dirty="0"/>
+              <a:t>　</a:t>
+            </a:r>
+            <a:r>
+              <a:rPr kumimoji="1" lang="en-US" altLang="ja-JP" dirty="0"/>
+              <a:t>※</a:t>
+            </a:r>
+            <a:r>
+              <a:rPr kumimoji="1" lang="ja-JP" altLang="en-US" dirty="0"/>
+              <a:t>従来の電話依頼による予約で、スタッフ自らが患者情報データを</a:t>
+            </a:r>
+            <a:r>
+              <a:rPr kumimoji="1" lang="en-US" altLang="ja-JP" dirty="0"/>
+              <a:t>CRM</a:t>
+            </a:r>
+            <a:r>
+              <a:rPr kumimoji="1" lang="ja-JP" altLang="en-US" dirty="0"/>
+              <a:t>に手動で登録する方法になったしても、この</a:t>
+            </a:r>
+            <a:r>
+              <a:rPr kumimoji="1" lang="en-US" altLang="ja-JP" dirty="0"/>
+              <a:t>CRM</a:t>
+            </a:r>
+            <a:r>
+              <a:rPr kumimoji="1" lang="ja-JP" altLang="en-US" dirty="0"/>
+              <a:t>運用をしたい場合は別途ご相談ください。</a:t>
+            </a:r>
+            <a:endParaRPr kumimoji="1" lang="en-US" altLang="ja-JP" dirty="0"/>
+          </a:p>
+          <a:p>
+            <a:pPr marL="0" indent="0">
+              <a:buNone/>
+            </a:pPr>
+            <a:endParaRPr lang="en-US" altLang="ja-JP" dirty="0"/>
+          </a:p>
+          <a:p>
+            <a:pPr marL="0" indent="0">
+              <a:buNone/>
+            </a:pPr>
+            <a:endParaRPr kumimoji="1" lang="en-US" altLang="ja-JP" dirty="0"/>
+          </a:p>
+          <a:p>
+            <a:endParaRPr kumimoji="1" lang="en-US" altLang="ja-JP" dirty="0"/>
+          </a:p>
+          <a:p>
+            <a:endParaRPr kumimoji="1" lang="en-US" altLang="ja-JP" dirty="0"/>
+          </a:p>
+          <a:p>
+            <a:endParaRPr kumimoji="1" lang="en-US" altLang="ja-JP" dirty="0"/>
+          </a:p>
+          <a:p>
+            <a:endParaRPr kumimoji="1" lang="ja-JP" altLang="en-US" dirty="0"/>
           </a:p>
         </p:txBody>
       </p:sp>
     </p:spTree>
     <p:extLst>
       <p:ext uri="{BB962C8B-B14F-4D97-AF65-F5344CB8AC3E}">
-        <p14:creationId xmlns:p14="http://schemas.microsoft.com/office/powerpoint/2010/main" val="1003078926"/>
+        <p14:creationId xmlns:p14="http://schemas.microsoft.com/office/powerpoint/2010/main" val="3472873037"/>
       </p:ext>
     </p:extLst>
   </p:cSld>
@@ -4110,6 +4497,1143 @@
 </file>
 
 <file path=ppt/slides/slide20.xml><?xml version="1.0" encoding="utf-8"?>
+<p:sld xmlns:a="http://schemas.openxmlformats.org/drawingml/2006/main" xmlns:r="http://schemas.openxmlformats.org/officeDocument/2006/relationships" xmlns:p="http://schemas.openxmlformats.org/presentationml/2006/main">
+  <p:cSld>
+    <p:spTree>
+      <p:nvGrpSpPr>
+        <p:cNvPr id="1" name=""/>
+        <p:cNvGrpSpPr/>
+        <p:nvPr/>
+      </p:nvGrpSpPr>
+      <p:grpSpPr>
+        <a:xfrm>
+          <a:off x="0" y="0"/>
+          <a:ext cx="0" cy="0"/>
+          <a:chOff x="0" y="0"/>
+          <a:chExt cx="0" cy="0"/>
+        </a:xfrm>
+      </p:grpSpPr>
+      <p:sp>
+        <p:nvSpPr>
+          <p:cNvPr id="2" name="タイトル 1">
+            <a:extLst>
+              <a:ext uri="{FF2B5EF4-FFF2-40B4-BE49-F238E27FC236}">
+                <a16:creationId xmlns:a16="http://schemas.microsoft.com/office/drawing/2014/main" id="{1F245752-9231-6699-CD79-DD3CC7B72A67}"/>
+              </a:ext>
+            </a:extLst>
+          </p:cNvPr>
+          <p:cNvSpPr>
+            <a:spLocks noGrp="1"/>
+          </p:cNvSpPr>
+          <p:nvPr>
+            <p:ph type="title"/>
+          </p:nvPr>
+        </p:nvSpPr>
+        <p:spPr/>
+        <p:txBody>
+          <a:bodyPr/>
+          <a:lstStyle/>
+          <a:p>
+            <a:r>
+              <a:rPr kumimoji="1" lang="ja-JP" altLang="en-US" dirty="0"/>
+              <a:t>メールを使った予約日時の確定合意処理について</a:t>
+            </a:r>
+          </a:p>
+        </p:txBody>
+      </p:sp>
+      <p:sp>
+        <p:nvSpPr>
+          <p:cNvPr id="3" name="コンテンツ プレースホルダー 2">
+            <a:extLst>
+              <a:ext uri="{FF2B5EF4-FFF2-40B4-BE49-F238E27FC236}">
+                <a16:creationId xmlns:a16="http://schemas.microsoft.com/office/drawing/2014/main" id="{B781AB5F-69C5-62A7-B237-23E08228A758}"/>
+              </a:ext>
+            </a:extLst>
+          </p:cNvPr>
+          <p:cNvSpPr>
+            <a:spLocks noGrp="1"/>
+          </p:cNvSpPr>
+          <p:nvPr>
+            <p:ph idx="1"/>
+          </p:nvPr>
+        </p:nvSpPr>
+        <p:spPr/>
+        <p:txBody>
+          <a:bodyPr>
+            <a:normAutofit/>
+          </a:bodyPr>
+          <a:lstStyle/>
+          <a:p>
+            <a:r>
+              <a:rPr kumimoji="1" lang="ja-JP" altLang="en-US" sz="1600" dirty="0"/>
+              <a:t>本システムでは、メールを用いて予約日時を患者に伝えますが、メールが読まれるかどうかを判断する仕組みが不可欠です。</a:t>
+            </a:r>
+            <a:endParaRPr kumimoji="1" lang="en-US" altLang="ja-JP" sz="1600" dirty="0"/>
+          </a:p>
+          <a:p>
+            <a:r>
+              <a:rPr kumimoji="1" lang="ja-JP" altLang="en-US" sz="1600" dirty="0">
+                <a:solidFill>
+                  <a:srgbClr val="FF0000"/>
+                </a:solidFill>
+              </a:rPr>
+              <a:t>そこで、送信メール本文</a:t>
+            </a:r>
+            <a:r>
+              <a:rPr lang="ja-JP" altLang="en-US" sz="1600" dirty="0">
+                <a:solidFill>
+                  <a:srgbClr val="FF0000"/>
+                </a:solidFill>
+              </a:rPr>
+              <a:t>には予約日時情報の表示を可能にするボタン（</a:t>
+            </a:r>
+            <a:r>
+              <a:rPr lang="en-US" altLang="ja-JP" sz="1600" dirty="0">
+                <a:solidFill>
+                  <a:srgbClr val="FF0000"/>
+                </a:solidFill>
+              </a:rPr>
+              <a:t>URL)</a:t>
+            </a:r>
+            <a:r>
+              <a:rPr lang="ja-JP" altLang="en-US" sz="1600" dirty="0">
+                <a:solidFill>
+                  <a:srgbClr val="FF0000"/>
+                </a:solidFill>
+              </a:rPr>
+              <a:t>のみを用意し、患者がメール内のそのボタンを「</a:t>
+            </a:r>
+            <a:r>
+              <a:rPr kumimoji="1" lang="ja-JP" altLang="en-US" sz="1600" dirty="0">
+                <a:solidFill>
+                  <a:srgbClr val="FF0000"/>
+                </a:solidFill>
+              </a:rPr>
+              <a:t>一定の制限時間内（タイムアウト値）に押したことを本システムが検出した時点で合意成立と判断する仕組みになっています。</a:t>
+            </a:r>
+            <a:endParaRPr lang="en-US" altLang="ja-JP" sz="1600" dirty="0">
+              <a:solidFill>
+                <a:srgbClr val="FF0000"/>
+              </a:solidFill>
+            </a:endParaRPr>
+          </a:p>
+          <a:p>
+            <a:pPr marL="0" indent="0">
+              <a:buNone/>
+            </a:pPr>
+            <a:r>
+              <a:rPr lang="ja-JP" altLang="en-US" sz="1600" dirty="0"/>
+              <a:t>タイムアウト値は</a:t>
+            </a:r>
+            <a:r>
+              <a:rPr kumimoji="1" lang="ja-JP" altLang="en-US" sz="1600" dirty="0"/>
+              <a:t>メールを送信する段階で担当者が選択できます</a:t>
+            </a:r>
+            <a:r>
+              <a:rPr kumimoji="1" lang="en-US" altLang="ja-JP" sz="1600" dirty="0"/>
+              <a:t>(</a:t>
+            </a:r>
+            <a:r>
+              <a:rPr kumimoji="1" lang="ja-JP" altLang="en-US" sz="1600" dirty="0"/>
+              <a:t>デフォルトは</a:t>
+            </a:r>
+            <a:r>
+              <a:rPr kumimoji="1" lang="en-US" altLang="ja-JP" sz="1600" dirty="0"/>
+              <a:t>2</a:t>
+            </a:r>
+            <a:r>
+              <a:rPr kumimoji="1" lang="ja-JP" altLang="en-US" sz="1600" dirty="0"/>
+              <a:t>時間</a:t>
+            </a:r>
+            <a:r>
+              <a:rPr kumimoji="1" lang="en-US" altLang="ja-JP" sz="1600" dirty="0"/>
+              <a:t>)</a:t>
+            </a:r>
+          </a:p>
+          <a:p>
+            <a:pPr marL="0" indent="0">
+              <a:buNone/>
+            </a:pPr>
+            <a:r>
+              <a:rPr lang="ja-JP" altLang="en-US" sz="1600" dirty="0"/>
+              <a:t>スタッフが帰宅間際の場合には当日の処理は困難なので</a:t>
+            </a:r>
+            <a:r>
+              <a:rPr lang="en-US" altLang="ja-JP" sz="1600" dirty="0"/>
+              <a:t>2</a:t>
+            </a:r>
+            <a:r>
+              <a:rPr lang="ja-JP" altLang="en-US" sz="1600" dirty="0"/>
+              <a:t>時間ではなく、実質的に明日の診療開始まで影響がないため、本日中まででよいなどといった幅を持たせられるようになっています。退勤時間に近づくにつれ表示される選択肢は減ります。</a:t>
+            </a:r>
+            <a:endParaRPr lang="en-US" altLang="ja-JP" sz="1600" dirty="0"/>
+          </a:p>
+          <a:p>
+            <a:pPr marL="0" indent="0">
+              <a:buNone/>
+            </a:pPr>
+            <a:r>
+              <a:rPr lang="ja-JP" altLang="en-US" sz="1600" dirty="0"/>
+              <a:t>タイムアウト値になるまでは「仮の予約日時」という概念となり、その間は電子カルテ側の予約枠もほかにとられないように確保しておく必要があります。</a:t>
+            </a:r>
+            <a:endParaRPr kumimoji="1" lang="en-US" altLang="ja-JP" sz="1600" dirty="0"/>
+          </a:p>
+          <a:p>
+            <a:pPr marL="0" indent="0">
+              <a:buNone/>
+            </a:pPr>
+            <a:r>
+              <a:rPr lang="ja-JP" altLang="en-US" sz="1600" dirty="0"/>
+              <a:t>・一方で</a:t>
+            </a:r>
+            <a:r>
+              <a:rPr kumimoji="1" lang="ja-JP" altLang="en-US" sz="1600" dirty="0"/>
+              <a:t>タイムアウトになった場合には、患者がメールを読まなかったということなので、</a:t>
+            </a:r>
+            <a:endParaRPr kumimoji="1" lang="en-US" altLang="ja-JP" sz="1600" dirty="0"/>
+          </a:p>
+          <a:p>
+            <a:pPr marL="0" indent="0">
+              <a:buNone/>
+            </a:pPr>
+            <a:r>
+              <a:rPr lang="ja-JP" altLang="en-US" sz="1600" dirty="0"/>
+              <a:t>一旦電カルの予約枠は開放したうえで、そのまま放置し患者からの再依頼を待つ、スタッフから電話対応に切り替えて📞での調整に入るなどいくつか対応パターンが考えられます。</a:t>
+            </a:r>
+            <a:endParaRPr lang="en-US" altLang="ja-JP" sz="1600" dirty="0"/>
+          </a:p>
+          <a:p>
+            <a:pPr marL="0" indent="0">
+              <a:buNone/>
+            </a:pPr>
+            <a:r>
+              <a:rPr kumimoji="1" lang="ja-JP" altLang="en-US" sz="1600" dirty="0"/>
+              <a:t>・過去の履歴からメールでのやり取りがとりにくい、既読にならない傾向がある患者かもしれません。その場合は、チケット到着後に</a:t>
+            </a:r>
+            <a:r>
+              <a:rPr kumimoji="1" lang="en-US" altLang="ja-JP" sz="1600" dirty="0"/>
+              <a:t>CRM</a:t>
+            </a:r>
+            <a:r>
+              <a:rPr kumimoji="1" lang="ja-JP" altLang="en-US" sz="1600" dirty="0"/>
+              <a:t>情報を参考に</a:t>
+            </a:r>
+            <a:r>
+              <a:rPr lang="ja-JP" altLang="en-US" sz="1600" dirty="0"/>
+              <a:t>📧対応ではなく、</a:t>
+            </a:r>
+            <a:r>
+              <a:rPr kumimoji="1" lang="ja-JP" altLang="en-US" sz="1600" dirty="0"/>
+              <a:t>すぐに架電をして会話を始めたほうが繫がりやすい可能性もあるかもしれません。</a:t>
+            </a:r>
+            <a:endParaRPr kumimoji="1" lang="en-US" altLang="ja-JP" sz="1600" dirty="0"/>
+          </a:p>
+          <a:p>
+            <a:pPr marL="0" indent="0">
+              <a:buNone/>
+            </a:pPr>
+            <a:r>
+              <a:rPr lang="ja-JP" altLang="en-US" sz="1600" dirty="0"/>
+              <a:t>・なお、患者が意図せずタイムアウトした場合を考慮して、チケットを保留にしたまま、本日中であれば患者側が再依頼の入力手間なく依頼できるようになっています（ただしこの時点では仮予約は開放されていますのでスタッフは再度別の仮予約日を確保してメールを送信します）。</a:t>
+            </a:r>
+            <a:endParaRPr kumimoji="1" lang="en-US" altLang="ja-JP" sz="1600" dirty="0"/>
+          </a:p>
+          <a:p>
+            <a:pPr marL="0" indent="0">
+              <a:buNone/>
+            </a:pPr>
+            <a:endParaRPr kumimoji="1" lang="en-US" altLang="ja-JP" sz="1600" dirty="0"/>
+          </a:p>
+          <a:p>
+            <a:endParaRPr kumimoji="1" lang="ja-JP" altLang="en-US" sz="1600" dirty="0"/>
+          </a:p>
+        </p:txBody>
+      </p:sp>
+    </p:spTree>
+    <p:extLst>
+      <p:ext uri="{BB962C8B-B14F-4D97-AF65-F5344CB8AC3E}">
+        <p14:creationId xmlns:p14="http://schemas.microsoft.com/office/powerpoint/2010/main" val="1175235402"/>
+      </p:ext>
+    </p:extLst>
+  </p:cSld>
+  <p:clrMapOvr>
+    <a:masterClrMapping/>
+  </p:clrMapOvr>
+</p:sld>
+</file>
+
+<file path=ppt/slides/slide21.xml><?xml version="1.0" encoding="utf-8"?>
+<p:sld xmlns:a="http://schemas.openxmlformats.org/drawingml/2006/main" xmlns:r="http://schemas.openxmlformats.org/officeDocument/2006/relationships" xmlns:p="http://schemas.openxmlformats.org/presentationml/2006/main">
+  <p:cSld>
+    <p:spTree>
+      <p:nvGrpSpPr>
+        <p:cNvPr id="1" name=""/>
+        <p:cNvGrpSpPr/>
+        <p:nvPr/>
+      </p:nvGrpSpPr>
+      <p:grpSpPr>
+        <a:xfrm>
+          <a:off x="0" y="0"/>
+          <a:ext cx="0" cy="0"/>
+          <a:chOff x="0" y="0"/>
+          <a:chExt cx="0" cy="0"/>
+        </a:xfrm>
+      </p:grpSpPr>
+      <p:sp>
+        <p:nvSpPr>
+          <p:cNvPr id="2" name="タイトル 1">
+            <a:extLst>
+              <a:ext uri="{FF2B5EF4-FFF2-40B4-BE49-F238E27FC236}">
+                <a16:creationId xmlns:a16="http://schemas.microsoft.com/office/drawing/2014/main" id="{F2515E7A-0D6C-0149-01D2-D25E9EB55622}"/>
+              </a:ext>
+            </a:extLst>
+          </p:cNvPr>
+          <p:cNvSpPr>
+            <a:spLocks noGrp="1"/>
+          </p:cNvSpPr>
+          <p:nvPr>
+            <p:ph type="title"/>
+          </p:nvPr>
+        </p:nvSpPr>
+        <p:spPr/>
+        <p:txBody>
+          <a:bodyPr/>
+          <a:lstStyle/>
+          <a:p>
+            <a:r>
+              <a:rPr kumimoji="1" lang="ja-JP" altLang="en-US" dirty="0"/>
+              <a:t>スタッフ設定</a:t>
+            </a:r>
+          </a:p>
+        </p:txBody>
+      </p:sp>
+      <p:sp>
+        <p:nvSpPr>
+          <p:cNvPr id="3" name="コンテンツ プレースホルダー 2">
+            <a:extLst>
+              <a:ext uri="{FF2B5EF4-FFF2-40B4-BE49-F238E27FC236}">
+                <a16:creationId xmlns:a16="http://schemas.microsoft.com/office/drawing/2014/main" id="{4BFA1D67-9FA8-6403-26A9-6E68B224CA0C}"/>
+              </a:ext>
+            </a:extLst>
+          </p:cNvPr>
+          <p:cNvSpPr>
+            <a:spLocks noGrp="1"/>
+          </p:cNvSpPr>
+          <p:nvPr>
+            <p:ph idx="1"/>
+          </p:nvPr>
+        </p:nvSpPr>
+        <p:spPr/>
+        <p:txBody>
+          <a:bodyPr/>
+          <a:lstStyle/>
+          <a:p>
+            <a:endParaRPr kumimoji="1" lang="ja-JP" altLang="en-US"/>
+          </a:p>
+        </p:txBody>
+      </p:sp>
+    </p:spTree>
+    <p:extLst>
+      <p:ext uri="{BB962C8B-B14F-4D97-AF65-F5344CB8AC3E}">
+        <p14:creationId xmlns:p14="http://schemas.microsoft.com/office/powerpoint/2010/main" val="852097310"/>
+      </p:ext>
+    </p:extLst>
+  </p:cSld>
+  <p:clrMapOvr>
+    <a:masterClrMapping/>
+  </p:clrMapOvr>
+</p:sld>
+</file>
+
+<file path=ppt/slides/slide22.xml><?xml version="1.0" encoding="utf-8"?>
+<p:sld xmlns:a="http://schemas.openxmlformats.org/drawingml/2006/main" xmlns:r="http://schemas.openxmlformats.org/officeDocument/2006/relationships" xmlns:p="http://schemas.openxmlformats.org/presentationml/2006/main">
+  <p:cSld>
+    <p:spTree>
+      <p:nvGrpSpPr>
+        <p:cNvPr id="1" name=""/>
+        <p:cNvGrpSpPr/>
+        <p:nvPr/>
+      </p:nvGrpSpPr>
+      <p:grpSpPr>
+        <a:xfrm>
+          <a:off x="0" y="0"/>
+          <a:ext cx="0" cy="0"/>
+          <a:chOff x="0" y="0"/>
+          <a:chExt cx="0" cy="0"/>
+        </a:xfrm>
+      </p:grpSpPr>
+      <p:sp>
+        <p:nvSpPr>
+          <p:cNvPr id="2" name="タイトル 1">
+            <a:extLst>
+              <a:ext uri="{FF2B5EF4-FFF2-40B4-BE49-F238E27FC236}">
+                <a16:creationId xmlns:a16="http://schemas.microsoft.com/office/drawing/2014/main" id="{B9C2226F-4205-B91D-E62A-350BB1796C3A}"/>
+              </a:ext>
+            </a:extLst>
+          </p:cNvPr>
+          <p:cNvSpPr>
+            <a:spLocks noGrp="1"/>
+          </p:cNvSpPr>
+          <p:nvPr>
+            <p:ph type="title"/>
+          </p:nvPr>
+        </p:nvSpPr>
+        <p:spPr/>
+        <p:txBody>
+          <a:bodyPr/>
+          <a:lstStyle/>
+          <a:p>
+            <a:r>
+              <a:rPr kumimoji="1" lang="ja-JP" altLang="en-US" dirty="0"/>
+              <a:t>取り下げ処理</a:t>
+            </a:r>
+          </a:p>
+        </p:txBody>
+      </p:sp>
+      <p:sp>
+        <p:nvSpPr>
+          <p:cNvPr id="3" name="コンテンツ プレースホルダー 2">
+            <a:extLst>
+              <a:ext uri="{FF2B5EF4-FFF2-40B4-BE49-F238E27FC236}">
+                <a16:creationId xmlns:a16="http://schemas.microsoft.com/office/drawing/2014/main" id="{63F90ABB-7FBC-7BC3-7F27-96CC0E41B464}"/>
+              </a:ext>
+            </a:extLst>
+          </p:cNvPr>
+          <p:cNvSpPr>
+            <a:spLocks noGrp="1"/>
+          </p:cNvSpPr>
+          <p:nvPr>
+            <p:ph idx="1"/>
+          </p:nvPr>
+        </p:nvSpPr>
+        <p:spPr/>
+        <p:txBody>
+          <a:bodyPr/>
+          <a:lstStyle/>
+          <a:p>
+            <a:endParaRPr kumimoji="1" lang="ja-JP" altLang="en-US"/>
+          </a:p>
+        </p:txBody>
+      </p:sp>
+    </p:spTree>
+    <p:extLst>
+      <p:ext uri="{BB962C8B-B14F-4D97-AF65-F5344CB8AC3E}">
+        <p14:creationId xmlns:p14="http://schemas.microsoft.com/office/powerpoint/2010/main" val="2975413030"/>
+      </p:ext>
+    </p:extLst>
+  </p:cSld>
+  <p:clrMapOvr>
+    <a:masterClrMapping/>
+  </p:clrMapOvr>
+</p:sld>
+</file>
+
+<file path=ppt/slides/slide23.xml><?xml version="1.0" encoding="utf-8"?>
+<p:sld xmlns:a="http://schemas.openxmlformats.org/drawingml/2006/main" xmlns:r="http://schemas.openxmlformats.org/officeDocument/2006/relationships" xmlns:p="http://schemas.openxmlformats.org/presentationml/2006/main">
+  <p:cSld>
+    <p:spTree>
+      <p:nvGrpSpPr>
+        <p:cNvPr id="1" name=""/>
+        <p:cNvGrpSpPr/>
+        <p:nvPr/>
+      </p:nvGrpSpPr>
+      <p:grpSpPr>
+        <a:xfrm>
+          <a:off x="0" y="0"/>
+          <a:ext cx="0" cy="0"/>
+          <a:chOff x="0" y="0"/>
+          <a:chExt cx="0" cy="0"/>
+        </a:xfrm>
+      </p:grpSpPr>
+      <p:sp>
+        <p:nvSpPr>
+          <p:cNvPr id="2" name="タイトル 1">
+            <a:extLst>
+              <a:ext uri="{FF2B5EF4-FFF2-40B4-BE49-F238E27FC236}">
+                <a16:creationId xmlns:a16="http://schemas.microsoft.com/office/drawing/2014/main" id="{4D3B0A94-FC39-DF97-69A5-BAC9D6B345D4}"/>
+              </a:ext>
+            </a:extLst>
+          </p:cNvPr>
+          <p:cNvSpPr>
+            <a:spLocks noGrp="1"/>
+          </p:cNvSpPr>
+          <p:nvPr>
+            <p:ph type="title"/>
+          </p:nvPr>
+        </p:nvSpPr>
+        <p:spPr/>
+        <p:txBody>
+          <a:bodyPr/>
+          <a:lstStyle/>
+          <a:p>
+            <a:r>
+              <a:rPr kumimoji="1" lang="ja-JP" altLang="en-US" dirty="0"/>
+              <a:t>メール対応から電話対応へ切り替える</a:t>
+            </a:r>
+          </a:p>
+        </p:txBody>
+      </p:sp>
+      <p:sp>
+        <p:nvSpPr>
+          <p:cNvPr id="3" name="コンテンツ プレースホルダー 2">
+            <a:extLst>
+              <a:ext uri="{FF2B5EF4-FFF2-40B4-BE49-F238E27FC236}">
+                <a16:creationId xmlns:a16="http://schemas.microsoft.com/office/drawing/2014/main" id="{816379A2-7773-7146-839F-B95E220BB506}"/>
+              </a:ext>
+            </a:extLst>
+          </p:cNvPr>
+          <p:cNvSpPr>
+            <a:spLocks noGrp="1"/>
+          </p:cNvSpPr>
+          <p:nvPr>
+            <p:ph idx="1"/>
+          </p:nvPr>
+        </p:nvSpPr>
+        <p:spPr/>
+        <p:txBody>
+          <a:bodyPr/>
+          <a:lstStyle/>
+          <a:p>
+            <a:endParaRPr kumimoji="1" lang="ja-JP" altLang="en-US" dirty="0"/>
+          </a:p>
+        </p:txBody>
+      </p:sp>
+    </p:spTree>
+    <p:extLst>
+      <p:ext uri="{BB962C8B-B14F-4D97-AF65-F5344CB8AC3E}">
+        <p14:creationId xmlns:p14="http://schemas.microsoft.com/office/powerpoint/2010/main" val="1658377675"/>
+      </p:ext>
+    </p:extLst>
+  </p:cSld>
+  <p:clrMapOvr>
+    <a:masterClrMapping/>
+  </p:clrMapOvr>
+</p:sld>
+</file>
+
+<file path=ppt/slides/slide24.xml><?xml version="1.0" encoding="utf-8"?>
+<p:sld xmlns:a="http://schemas.openxmlformats.org/drawingml/2006/main" xmlns:r="http://schemas.openxmlformats.org/officeDocument/2006/relationships" xmlns:p="http://schemas.openxmlformats.org/presentationml/2006/main">
+  <p:cSld>
+    <p:spTree>
+      <p:nvGrpSpPr>
+        <p:cNvPr id="1" name=""/>
+        <p:cNvGrpSpPr/>
+        <p:nvPr/>
+      </p:nvGrpSpPr>
+      <p:grpSpPr>
+        <a:xfrm>
+          <a:off x="0" y="0"/>
+          <a:ext cx="0" cy="0"/>
+          <a:chOff x="0" y="0"/>
+          <a:chExt cx="0" cy="0"/>
+        </a:xfrm>
+      </p:grpSpPr>
+      <p:sp>
+        <p:nvSpPr>
+          <p:cNvPr id="2" name="タイトル 1">
+            <a:extLst>
+              <a:ext uri="{FF2B5EF4-FFF2-40B4-BE49-F238E27FC236}">
+                <a16:creationId xmlns:a16="http://schemas.microsoft.com/office/drawing/2014/main" id="{D6665F36-22B9-72D6-EF8E-E5684086E147}"/>
+              </a:ext>
+            </a:extLst>
+          </p:cNvPr>
+          <p:cNvSpPr>
+            <a:spLocks noGrp="1"/>
+          </p:cNvSpPr>
+          <p:nvPr>
+            <p:ph type="title"/>
+          </p:nvPr>
+        </p:nvSpPr>
+        <p:spPr/>
+        <p:txBody>
+          <a:bodyPr/>
+          <a:lstStyle/>
+          <a:p>
+            <a:r>
+              <a:rPr lang="ja-JP" altLang="ja-JP" dirty="0"/>
+              <a:t>■ 予約受付ルートの拡張と「仮予約」の概念について</a:t>
+            </a:r>
+            <a:endParaRPr kumimoji="1" lang="ja-JP" altLang="en-US" dirty="0"/>
+          </a:p>
+        </p:txBody>
+      </p:sp>
+      <p:sp>
+        <p:nvSpPr>
+          <p:cNvPr id="3" name="コンテンツ プレースホルダー 2">
+            <a:extLst>
+              <a:ext uri="{FF2B5EF4-FFF2-40B4-BE49-F238E27FC236}">
+                <a16:creationId xmlns:a16="http://schemas.microsoft.com/office/drawing/2014/main" id="{A1525CDE-83E0-5985-8F57-E878CEF67F1E}"/>
+              </a:ext>
+            </a:extLst>
+          </p:cNvPr>
+          <p:cNvSpPr>
+            <a:spLocks noGrp="1"/>
+          </p:cNvSpPr>
+          <p:nvPr>
+            <p:ph idx="1"/>
+          </p:nvPr>
+        </p:nvSpPr>
+        <p:spPr/>
+        <p:txBody>
+          <a:bodyPr>
+            <a:noAutofit/>
+          </a:bodyPr>
+          <a:lstStyle/>
+          <a:p>
+            <a:pPr marL="0" indent="0">
+              <a:buNone/>
+            </a:pPr>
+            <a:r>
+              <a:rPr lang="ja-JP" altLang="ja-JP" sz="1200" dirty="0"/>
+              <a:t>本システムでは、従来の「①お電話でのご予約」に加え、新たにWebフォーム経由の受付ルートが拡張されました。これにより、ご案内方法は以下の3パターンとなります。</a:t>
+            </a:r>
+          </a:p>
+          <a:p>
+            <a:pPr marL="0" lvl="0" indent="0">
+              <a:lnSpc>
+                <a:spcPct val="100000"/>
+              </a:lnSpc>
+              <a:buNone/>
+            </a:pPr>
+            <a:r>
+              <a:rPr lang="ja-JP" altLang="ja-JP" sz="1200" b="1" dirty="0"/>
+              <a:t>① お電話でのご予約</a:t>
+            </a:r>
+            <a:r>
+              <a:rPr lang="ja-JP" altLang="ja-JP" sz="1200" dirty="0"/>
+              <a:t>（従来通り）</a:t>
+            </a:r>
+          </a:p>
+          <a:p>
+            <a:pPr marL="0" lvl="0" indent="0">
+              <a:lnSpc>
+                <a:spcPct val="100000"/>
+              </a:lnSpc>
+              <a:buNone/>
+            </a:pPr>
+            <a:r>
+              <a:rPr lang="ja-JP" altLang="ja-JP" sz="1200" b="1" dirty="0"/>
+              <a:t>② Webフォーム ＋ メールでのご案内</a:t>
+            </a:r>
+            <a:r>
+              <a:rPr lang="ja-JP" altLang="ja-JP" sz="1200" dirty="0"/>
+              <a:t>（新しいルート）</a:t>
+            </a:r>
+          </a:p>
+          <a:p>
+            <a:pPr marL="0" lvl="0" indent="0">
+              <a:lnSpc>
+                <a:spcPct val="100000"/>
+              </a:lnSpc>
+              <a:buNone/>
+            </a:pPr>
+            <a:r>
+              <a:rPr lang="ja-JP" altLang="ja-JP" sz="1200" b="1" dirty="0"/>
+              <a:t>③ Webフォーム ＋ お電話でのご案内</a:t>
+            </a:r>
+            <a:r>
+              <a:rPr lang="ja-JP" altLang="ja-JP" sz="1200" dirty="0"/>
+              <a:t>（必要に応じて）</a:t>
+            </a:r>
+          </a:p>
+          <a:p>
+            <a:pPr marL="0" indent="0">
+              <a:buNone/>
+            </a:pPr>
+            <a:r>
+              <a:rPr lang="ja-JP" altLang="ja-JP" sz="1200" dirty="0"/>
+              <a:t>ここで重要になるのが、②および③のルートです。 Webフォームからのご予約は、患者からの「ご希望の送信」と、クリニックからの「日時のご案内」の間にどうしてもタイムラグ（時差）</a:t>
+            </a:r>
+            <a:r>
+              <a:rPr lang="ja-JP" altLang="ja-JP" sz="1200" b="1" dirty="0"/>
+              <a:t>が生じます。そのため、日時をご案内した時点ではまだ予約は成立しておらず、枠を一時的に確保する</a:t>
+            </a:r>
+            <a:r>
+              <a:rPr lang="ja-JP" altLang="ja-JP" sz="1200" dirty="0"/>
+              <a:t>「仮予約」として扱う必要があります。</a:t>
+            </a:r>
+            <a:endParaRPr lang="en-US" altLang="ja-JP" sz="1200" dirty="0"/>
+          </a:p>
+          <a:p>
+            <a:pPr marL="0" indent="0">
+              <a:buNone/>
+            </a:pPr>
+            <a:r>
+              <a:rPr lang="ja-JP" altLang="ja-JP" sz="1200" b="1" dirty="0"/>
+              <a:t>■ なぜ「メールを送っただけ」ではダメなのか？</a:t>
+            </a:r>
+            <a:endParaRPr lang="ja-JP" altLang="ja-JP" sz="1200" dirty="0"/>
+          </a:p>
+          <a:p>
+            <a:pPr marL="0" indent="0">
+              <a:buNone/>
+            </a:pPr>
+            <a:r>
+              <a:rPr lang="ja-JP" altLang="ja-JP" sz="1200" dirty="0"/>
+              <a:t>たとえば、「今なら空き枠がある」と仮予約日時を記した案内メールをお送りしても、以下のような理由から</a:t>
+            </a:r>
+            <a:r>
+              <a:rPr lang="ja-JP" altLang="en-US" sz="1200" dirty="0"/>
+              <a:t>患者</a:t>
+            </a:r>
+            <a:r>
+              <a:rPr lang="ja-JP" altLang="ja-JP" sz="1200" dirty="0"/>
+              <a:t>に内容が伝わっていないリスクが常に潜んでいます。</a:t>
+            </a:r>
+          </a:p>
+          <a:p>
+            <a:pPr marL="0" indent="0">
+              <a:buNone/>
+            </a:pPr>
+            <a:r>
+              <a:rPr lang="ja-JP" altLang="ja-JP" sz="1200" b="1" dirty="0"/>
+              <a:t>【時間的要因】</a:t>
+            </a:r>
+            <a:r>
+              <a:rPr lang="ja-JP" altLang="ja-JP" sz="1200" dirty="0"/>
+              <a:t> 忙しくて、まだメールをチェックできていない（少しお待ちいただく猶予が必要です）</a:t>
+            </a:r>
+          </a:p>
+          <a:p>
+            <a:pPr marL="0" indent="0">
+              <a:buNone/>
+            </a:pPr>
+            <a:r>
+              <a:rPr lang="ja-JP" altLang="ja-JP" sz="1200" b="1" dirty="0"/>
+              <a:t>【スキル的要因】</a:t>
+            </a:r>
+            <a:r>
+              <a:rPr lang="ja-JP" altLang="ja-JP" sz="1200" dirty="0"/>
+              <a:t>メールの操作に不慣れで、受信に気づいていない</a:t>
+            </a:r>
+          </a:p>
+          <a:p>
+            <a:pPr marL="0" indent="0">
+              <a:buNone/>
+            </a:pPr>
+            <a:r>
+              <a:rPr lang="ja-JP" altLang="ja-JP" sz="1200" b="1" dirty="0"/>
+              <a:t>【環境的要因】</a:t>
+            </a:r>
+            <a:r>
+              <a:rPr lang="ja-JP" altLang="ja-JP" sz="1200" dirty="0"/>
+              <a:t> 迷惑メールフォルダに自動で振り分けられてしまっている</a:t>
+            </a:r>
+          </a:p>
+          <a:p>
+            <a:pPr marL="0" indent="0">
+              <a:buNone/>
+            </a:pPr>
+            <a:r>
+              <a:rPr lang="ja-JP" altLang="ja-JP" sz="1200" dirty="0"/>
+              <a:t>（※</a:t>
+            </a:r>
+            <a:r>
+              <a:rPr lang="ja-JP" altLang="en-US" sz="1200" dirty="0"/>
+              <a:t>こちらから電話をかけて</a:t>
+            </a:r>
+            <a:r>
+              <a:rPr lang="ja-JP" altLang="ja-JP" sz="1200" dirty="0"/>
+              <a:t>ご案内する場合も、「何度かけても繋がらない」という同様のリスクがあります）</a:t>
+            </a:r>
+          </a:p>
+          <a:p>
+            <a:pPr marL="0" indent="0">
+              <a:buNone/>
+            </a:pPr>
+            <a:r>
+              <a:rPr lang="ja-JP" altLang="ja-JP" sz="1200" dirty="0"/>
+              <a:t>このうち、「時間的要因」以外はいくら待っても患者がご自身で気づくことは期待できません。このような状態で「クリニックから案内を送ったから予約確定」と</a:t>
+            </a:r>
+            <a:r>
+              <a:rPr lang="ja-JP" altLang="en-US" sz="1200" dirty="0"/>
+              <a:t>判断して</a:t>
+            </a:r>
+            <a:r>
+              <a:rPr lang="ja-JP" altLang="ja-JP" sz="1200" dirty="0"/>
+              <a:t>しまうと、「当日いらっしゃらない」「言った・言わない」といった大きなトラブルに至るリスクが高くなります。</a:t>
+            </a:r>
+            <a:endParaRPr lang="en-US" altLang="ja-JP" sz="1200" dirty="0"/>
+          </a:p>
+          <a:p>
+            <a:pPr marL="0" indent="0">
+              <a:buNone/>
+            </a:pPr>
+            <a:r>
+              <a:rPr lang="ja-JP" altLang="ja-JP" sz="1200" b="1" dirty="0"/>
+              <a:t>■ トラブルを未然に防ぐ「既読検出処理」</a:t>
+            </a:r>
+            <a:endParaRPr lang="ja-JP" altLang="ja-JP" sz="1200" dirty="0"/>
+          </a:p>
+          <a:p>
+            <a:pPr marL="0" indent="0">
+              <a:buNone/>
+            </a:pPr>
+            <a:r>
+              <a:rPr lang="ja-JP" altLang="ja-JP" sz="1200" dirty="0"/>
+              <a:t>そこで本システムでは、安全かつ確実に予約を成立させるため、新たに「既読検出処理」を導入しています。</a:t>
+            </a:r>
+          </a:p>
+          <a:p>
+            <a:pPr marL="0" indent="0">
+              <a:buNone/>
+            </a:pPr>
+            <a:r>
+              <a:rPr lang="ja-JP" altLang="ja-JP" sz="1200" dirty="0"/>
+              <a:t>患者</a:t>
+            </a:r>
+            <a:r>
+              <a:rPr lang="ja-JP" altLang="en-US" sz="1200" dirty="0"/>
+              <a:t>に届く最初の</a:t>
+            </a:r>
+            <a:r>
+              <a:rPr lang="ja-JP" altLang="ja-JP" sz="1200" dirty="0"/>
+              <a:t>ご案内メール</a:t>
+            </a:r>
+            <a:r>
+              <a:rPr lang="ja-JP" altLang="en-US" sz="1200" dirty="0"/>
+              <a:t>本文には予約日時情報は載せておらず、あえて</a:t>
+            </a:r>
+            <a:r>
+              <a:rPr lang="ja-JP" altLang="ja-JP" sz="1200" dirty="0"/>
+              <a:t>「ご自身の予約日時情報にアクセスする」というリンク</a:t>
+            </a:r>
+            <a:r>
+              <a:rPr lang="ja-JP" altLang="en-US" sz="1200" dirty="0"/>
+              <a:t>ボタン</a:t>
+            </a:r>
+            <a:r>
+              <a:rPr lang="ja-JP" altLang="ja-JP" sz="1200" dirty="0"/>
+              <a:t>を</a:t>
+            </a:r>
+            <a:r>
+              <a:rPr lang="ja-JP" altLang="en-US" sz="1200" dirty="0"/>
+              <a:t>押さないと確認できないようにしており、患者のこのアクションを</a:t>
+            </a:r>
+            <a:r>
+              <a:rPr lang="ja-JP" altLang="ja-JP" sz="1200" dirty="0"/>
+              <a:t>システムが自動で検知し</a:t>
+            </a:r>
+            <a:r>
+              <a:rPr lang="ja-JP" altLang="en-US" sz="1200" dirty="0"/>
+              <a:t>て</a:t>
+            </a:r>
+            <a:r>
+              <a:rPr lang="ja-JP" altLang="ja-JP" sz="1200" dirty="0"/>
+              <a:t>【メール既読】</a:t>
+            </a:r>
+            <a:r>
+              <a:rPr lang="ja-JP" altLang="en-US" sz="1200" dirty="0"/>
+              <a:t>の状態に移行します。これにより</a:t>
+            </a:r>
+            <a:r>
+              <a:rPr lang="ja-JP" altLang="ja-JP" sz="1200" dirty="0"/>
+              <a:t>スタッフは「間違いなく</a:t>
+            </a:r>
+            <a:r>
+              <a:rPr lang="ja-JP" altLang="en-US" sz="1200" dirty="0"/>
+              <a:t>患者</a:t>
+            </a:r>
+            <a:r>
+              <a:rPr lang="ja-JP" altLang="ja-JP" sz="1200" dirty="0"/>
+              <a:t>に伝わった」と</a:t>
+            </a:r>
+            <a:r>
+              <a:rPr lang="ja-JP" altLang="en-US" sz="1200" dirty="0"/>
+              <a:t>みなして、仮予約から確定予約として処理します。</a:t>
+            </a:r>
+            <a:endParaRPr lang="ja-JP" altLang="ja-JP" sz="1200" dirty="0"/>
+          </a:p>
+          <a:p>
+            <a:pPr marL="0" indent="0">
+              <a:buNone/>
+            </a:pPr>
+            <a:r>
+              <a:rPr lang="ja-JP" altLang="ja-JP" sz="1200" dirty="0"/>
+              <a:t>本システムの細やかな状態遷移（ステータス管理）は、患者とのすれ違いトラブルを防ぎ、スムーズな診療を実現するための大切な仕組みとなっています。</a:t>
+            </a:r>
+          </a:p>
+        </p:txBody>
+      </p:sp>
+    </p:spTree>
+    <p:extLst>
+      <p:ext uri="{BB962C8B-B14F-4D97-AF65-F5344CB8AC3E}">
+        <p14:creationId xmlns:p14="http://schemas.microsoft.com/office/powerpoint/2010/main" val="3993378393"/>
+      </p:ext>
+    </p:extLst>
+  </p:cSld>
+  <p:clrMapOvr>
+    <a:masterClrMapping/>
+  </p:clrMapOvr>
+</p:sld>
+</file>
+
+<file path=ppt/slides/slide25.xml><?xml version="1.0" encoding="utf-8"?>
+<p:sld xmlns:a="http://schemas.openxmlformats.org/drawingml/2006/main" xmlns:r="http://schemas.openxmlformats.org/officeDocument/2006/relationships" xmlns:p="http://schemas.openxmlformats.org/presentationml/2006/main">
+  <p:cSld>
+    <p:spTree>
+      <p:nvGrpSpPr>
+        <p:cNvPr id="1" name=""/>
+        <p:cNvGrpSpPr/>
+        <p:nvPr/>
+      </p:nvGrpSpPr>
+      <p:grpSpPr>
+        <a:xfrm>
+          <a:off x="0" y="0"/>
+          <a:ext cx="0" cy="0"/>
+          <a:chOff x="0" y="0"/>
+          <a:chExt cx="0" cy="0"/>
+        </a:xfrm>
+      </p:grpSpPr>
+      <p:sp>
+        <p:nvSpPr>
+          <p:cNvPr id="2" name="タイトル 1">
+            <a:extLst>
+              <a:ext uri="{FF2B5EF4-FFF2-40B4-BE49-F238E27FC236}">
+                <a16:creationId xmlns:a16="http://schemas.microsoft.com/office/drawing/2014/main" id="{DC045806-3641-6C25-9925-40D508A29B41}"/>
+              </a:ext>
+            </a:extLst>
+          </p:cNvPr>
+          <p:cNvSpPr>
+            <a:spLocks noGrp="1"/>
+          </p:cNvSpPr>
+          <p:nvPr>
+            <p:ph type="title"/>
+          </p:nvPr>
+        </p:nvSpPr>
+        <p:spPr/>
+        <p:txBody>
+          <a:bodyPr/>
+          <a:lstStyle/>
+          <a:p>
+            <a:r>
+              <a:rPr kumimoji="1" lang="ja-JP" altLang="en-US" dirty="0"/>
+              <a:t>閲覧期限</a:t>
+            </a:r>
+          </a:p>
+        </p:txBody>
+      </p:sp>
+      <p:sp>
+        <p:nvSpPr>
+          <p:cNvPr id="3" name="コンテンツ プレースホルダー 2">
+            <a:extLst>
+              <a:ext uri="{FF2B5EF4-FFF2-40B4-BE49-F238E27FC236}">
+                <a16:creationId xmlns:a16="http://schemas.microsoft.com/office/drawing/2014/main" id="{BB3F0B2E-9F96-1CF2-98A0-70ECB5DB01F0}"/>
+              </a:ext>
+            </a:extLst>
+          </p:cNvPr>
+          <p:cNvSpPr>
+            <a:spLocks noGrp="1"/>
+          </p:cNvSpPr>
+          <p:nvPr>
+            <p:ph idx="1"/>
+          </p:nvPr>
+        </p:nvSpPr>
+        <p:spPr/>
+        <p:txBody>
+          <a:bodyPr/>
+          <a:lstStyle/>
+          <a:p>
+            <a:r>
+              <a:rPr kumimoji="1" lang="ja-JP" altLang="en-US" dirty="0"/>
+              <a:t>仮予約状態はいつまでも続けることができません。</a:t>
+            </a:r>
+            <a:endParaRPr kumimoji="1" lang="en-US" altLang="ja-JP" dirty="0"/>
+          </a:p>
+          <a:p>
+            <a:r>
+              <a:rPr lang="ja-JP" altLang="en-US" dirty="0"/>
+              <a:t>仮予約の状態の枠があくまで他の患者が待つ可能性もあるので、</a:t>
+            </a:r>
+            <a:endParaRPr lang="en-US" altLang="ja-JP" dirty="0"/>
+          </a:p>
+          <a:p>
+            <a:r>
+              <a:rPr lang="ja-JP" altLang="en-US" dirty="0"/>
+              <a:t>診療科によってはある程度長時間の猶予を与えられることもあるでしょう。</a:t>
+            </a:r>
+            <a:endParaRPr lang="en-US" altLang="ja-JP" dirty="0"/>
+          </a:p>
+          <a:p>
+            <a:r>
+              <a:rPr lang="ja-JP" altLang="en-US" dirty="0"/>
+              <a:t>あるいはスタッフの退勤時刻間際（本日の診療時間が終了する間際）にチケット新着があった場合は、スタッフの対応が困難であるので、閲覧期限を長くとってメール案内をしても実質的に影響はないでしょう。</a:t>
+            </a:r>
+            <a:endParaRPr lang="en-US" altLang="ja-JP" dirty="0"/>
+          </a:p>
+          <a:p>
+            <a:r>
+              <a:rPr lang="ja-JP" altLang="en-US" dirty="0"/>
+              <a:t>そこで猶予する時間をあらかじめ選択できるようになっています。</a:t>
+            </a:r>
+            <a:endParaRPr lang="en-US" altLang="ja-JP" dirty="0"/>
+          </a:p>
+          <a:p>
+            <a:r>
+              <a:rPr lang="ja-JP" altLang="en-US" dirty="0"/>
+              <a:t>当システムは現在時刻に応じて夕方になるほど設定できる閲覧期限が絞られます。</a:t>
+            </a:r>
+            <a:endParaRPr lang="en-US" altLang="ja-JP" dirty="0"/>
+          </a:p>
+          <a:p>
+            <a:endParaRPr lang="en-US" altLang="ja-JP" dirty="0"/>
+          </a:p>
+          <a:p>
+            <a:endParaRPr lang="en-US" altLang="ja-JP" dirty="0"/>
+          </a:p>
+          <a:p>
+            <a:endParaRPr lang="en-US" altLang="ja-JP" dirty="0"/>
+          </a:p>
+          <a:p>
+            <a:pPr marL="0" indent="0">
+              <a:buNone/>
+            </a:pPr>
+            <a:endParaRPr kumimoji="1" lang="ja-JP" altLang="en-US" dirty="0"/>
+          </a:p>
+        </p:txBody>
+      </p:sp>
+    </p:spTree>
+    <p:extLst>
+      <p:ext uri="{BB962C8B-B14F-4D97-AF65-F5344CB8AC3E}">
+        <p14:creationId xmlns:p14="http://schemas.microsoft.com/office/powerpoint/2010/main" val="2854704620"/>
+      </p:ext>
+    </p:extLst>
+  </p:cSld>
+  <p:clrMapOvr>
+    <a:masterClrMapping/>
+  </p:clrMapOvr>
+</p:sld>
+</file>
+
+<file path=ppt/slides/slide26.xml><?xml version="1.0" encoding="utf-8"?>
+<p:sld xmlns:a="http://schemas.openxmlformats.org/drawingml/2006/main" xmlns:r="http://schemas.openxmlformats.org/officeDocument/2006/relationships" xmlns:p="http://schemas.openxmlformats.org/presentationml/2006/main">
+  <p:cSld>
+    <p:spTree>
+      <p:nvGrpSpPr>
+        <p:cNvPr id="1" name=""/>
+        <p:cNvGrpSpPr/>
+        <p:nvPr/>
+      </p:nvGrpSpPr>
+      <p:grpSpPr>
+        <a:xfrm>
+          <a:off x="0" y="0"/>
+          <a:ext cx="0" cy="0"/>
+          <a:chOff x="0" y="0"/>
+          <a:chExt cx="0" cy="0"/>
+        </a:xfrm>
+      </p:grpSpPr>
+      <p:sp>
+        <p:nvSpPr>
+          <p:cNvPr id="2" name="タイトル 1">
+            <a:extLst>
+              <a:ext uri="{FF2B5EF4-FFF2-40B4-BE49-F238E27FC236}">
+                <a16:creationId xmlns:a16="http://schemas.microsoft.com/office/drawing/2014/main" id="{CB718237-8642-2A70-A048-6A4FC7B0622D}"/>
+              </a:ext>
+            </a:extLst>
+          </p:cNvPr>
+          <p:cNvSpPr>
+            <a:spLocks noGrp="1"/>
+          </p:cNvSpPr>
+          <p:nvPr>
+            <p:ph type="title"/>
+          </p:nvPr>
+        </p:nvSpPr>
+        <p:spPr/>
+        <p:txBody>
+          <a:bodyPr/>
+          <a:lstStyle/>
+          <a:p>
+            <a:r>
+              <a:rPr kumimoji="1" lang="ja-JP" altLang="en-US" dirty="0"/>
+              <a:t>患者がちゃんと予定通り診療を受けたかも管理</a:t>
+            </a:r>
+          </a:p>
+        </p:txBody>
+      </p:sp>
+      <p:sp>
+        <p:nvSpPr>
+          <p:cNvPr id="3" name="コンテンツ プレースホルダー 2">
+            <a:extLst>
+              <a:ext uri="{FF2B5EF4-FFF2-40B4-BE49-F238E27FC236}">
+                <a16:creationId xmlns:a16="http://schemas.microsoft.com/office/drawing/2014/main" id="{A1AACB16-0B22-178F-D606-17490FDE16C7}"/>
+              </a:ext>
+            </a:extLst>
+          </p:cNvPr>
+          <p:cNvSpPr>
+            <a:spLocks noGrp="1"/>
+          </p:cNvSpPr>
+          <p:nvPr>
+            <p:ph idx="1"/>
+          </p:nvPr>
+        </p:nvSpPr>
+        <p:spPr/>
+        <p:txBody>
+          <a:bodyPr/>
+          <a:lstStyle/>
+          <a:p>
+            <a:r>
+              <a:rPr kumimoji="1" lang="ja-JP" altLang="en-US" dirty="0"/>
+              <a:t>患者が予約日時通りに診察を受けたかどうかを電子カルテ側の情報などをもとに確認してチケットを終了させる必要があります。</a:t>
+            </a:r>
+            <a:endParaRPr kumimoji="1" lang="en-US" altLang="ja-JP" dirty="0"/>
+          </a:p>
+          <a:p>
+            <a:r>
+              <a:rPr lang="ja-JP" altLang="en-US" dirty="0"/>
+              <a:t>実際</a:t>
+            </a:r>
+            <a:r>
+              <a:rPr kumimoji="1" lang="ja-JP" altLang="en-US" dirty="0"/>
+              <a:t>に対象患者が予定通り問題なく受診されたのかという情報も次回の</a:t>
+            </a:r>
+            <a:r>
+              <a:rPr lang="ja-JP" altLang="en-US" dirty="0"/>
+              <a:t>対応方法として有用な</a:t>
+            </a:r>
+            <a:r>
+              <a:rPr kumimoji="1" lang="ja-JP" altLang="en-US" dirty="0"/>
+              <a:t>ので</a:t>
+            </a:r>
+            <a:r>
+              <a:rPr kumimoji="1" lang="en-US" altLang="ja-JP" dirty="0"/>
+              <a:t>CRM</a:t>
+            </a:r>
+            <a:r>
+              <a:rPr kumimoji="1" lang="ja-JP" altLang="en-US" dirty="0"/>
+              <a:t>に残すようにします。</a:t>
+            </a:r>
+            <a:endParaRPr kumimoji="1" lang="en-US" altLang="ja-JP" dirty="0"/>
+          </a:p>
+          <a:p>
+            <a:r>
+              <a:rPr kumimoji="1" lang="ja-JP" altLang="en-US" dirty="0"/>
+              <a:t>予約日時通りに診療が</a:t>
+            </a:r>
+            <a:r>
+              <a:rPr lang="ja-JP" altLang="en-US" dirty="0"/>
+              <a:t>進行</a:t>
+            </a:r>
+            <a:r>
+              <a:rPr kumimoji="1" lang="ja-JP" altLang="en-US" dirty="0"/>
+              <a:t>しないことがあるため、この終了判定は診療日の翌日に問われるようになっています（翌日になるとチケットは自動的に評価待ちとなります）</a:t>
+            </a:r>
+          </a:p>
+        </p:txBody>
+      </p:sp>
+    </p:spTree>
+    <p:extLst>
+      <p:ext uri="{BB962C8B-B14F-4D97-AF65-F5344CB8AC3E}">
+        <p14:creationId xmlns:p14="http://schemas.microsoft.com/office/powerpoint/2010/main" val="1003078926"/>
+      </p:ext>
+    </p:extLst>
+  </p:cSld>
+  <p:clrMapOvr>
+    <a:masterClrMapping/>
+  </p:clrMapOvr>
+</p:sld>
+</file>
+
+<file path=ppt/slides/slide27.xml><?xml version="1.0" encoding="utf-8"?>
 <p:sld xmlns:a="http://schemas.openxmlformats.org/drawingml/2006/main" xmlns:r="http://schemas.openxmlformats.org/officeDocument/2006/relationships" xmlns:p="http://schemas.openxmlformats.org/presentationml/2006/main">
   <p:cSld>
     <p:spTree>
@@ -4181,7 +5705,7 @@
 </p:sld>
 </file>
 
-<file path=ppt/slides/slide21.xml><?xml version="1.0" encoding="utf-8"?>
+<file path=ppt/slides/slide28.xml><?xml version="1.0" encoding="utf-8"?>
 <p:sld xmlns:a="http://schemas.openxmlformats.org/drawingml/2006/main" xmlns:r="http://schemas.openxmlformats.org/officeDocument/2006/relationships" xmlns:p="http://schemas.openxmlformats.org/presentationml/2006/main">
   <p:cSld>
     <p:spTree>
@@ -4265,7 +5789,7 @@
 </p:sld>
 </file>
 
-<file path=ppt/slides/slide22.xml><?xml version="1.0" encoding="utf-8"?>
+<file path=ppt/slides/slide29.xml><?xml version="1.0" encoding="utf-8"?>
 <p:sld xmlns:a="http://schemas.openxmlformats.org/drawingml/2006/main" xmlns:r="http://schemas.openxmlformats.org/officeDocument/2006/relationships" xmlns:p="http://schemas.openxmlformats.org/presentationml/2006/main">
   <p:cSld>
     <p:spTree>
@@ -4353,7 +5877,319 @@
 </p:sld>
 </file>
 
-<file path=ppt/slides/slide23.xml><?xml version="1.0" encoding="utf-8"?>
+<file path=ppt/slides/slide3.xml><?xml version="1.0" encoding="utf-8"?>
+<p:sld xmlns:a="http://schemas.openxmlformats.org/drawingml/2006/main" xmlns:r="http://schemas.openxmlformats.org/officeDocument/2006/relationships" xmlns:p="http://schemas.openxmlformats.org/presentationml/2006/main">
+  <p:cSld>
+    <p:spTree>
+      <p:nvGrpSpPr>
+        <p:cNvPr id="1" name=""/>
+        <p:cNvGrpSpPr/>
+        <p:nvPr/>
+      </p:nvGrpSpPr>
+      <p:grpSpPr>
+        <a:xfrm>
+          <a:off x="0" y="0"/>
+          <a:ext cx="0" cy="0"/>
+          <a:chOff x="0" y="0"/>
+          <a:chExt cx="0" cy="0"/>
+        </a:xfrm>
+      </p:grpSpPr>
+      <p:sp>
+        <p:nvSpPr>
+          <p:cNvPr id="2" name="タイトル 1">
+            <a:extLst>
+              <a:ext uri="{FF2B5EF4-FFF2-40B4-BE49-F238E27FC236}">
+                <a16:creationId xmlns:a16="http://schemas.microsoft.com/office/drawing/2014/main" id="{BD2839F0-5B37-47A3-5903-6D1C8D41D4EA}"/>
+              </a:ext>
+            </a:extLst>
+          </p:cNvPr>
+          <p:cNvSpPr>
+            <a:spLocks noGrp="1"/>
+          </p:cNvSpPr>
+          <p:nvPr>
+            <p:ph type="title"/>
+          </p:nvPr>
+        </p:nvSpPr>
+        <p:spPr/>
+        <p:txBody>
+          <a:bodyPr/>
+          <a:lstStyle/>
+          <a:p>
+            <a:r>
+              <a:rPr kumimoji="1" lang="ja-JP" altLang="en-US" dirty="0"/>
+              <a:t>できること</a:t>
+            </a:r>
+          </a:p>
+        </p:txBody>
+      </p:sp>
+      <p:sp>
+        <p:nvSpPr>
+          <p:cNvPr id="3" name="コンテンツ プレースホルダー 2">
+            <a:extLst>
+              <a:ext uri="{FF2B5EF4-FFF2-40B4-BE49-F238E27FC236}">
+                <a16:creationId xmlns:a16="http://schemas.microsoft.com/office/drawing/2014/main" id="{BBC3F2BD-11EF-424C-EEC5-1708C48EA7DD}"/>
+              </a:ext>
+            </a:extLst>
+          </p:cNvPr>
+          <p:cNvSpPr>
+            <a:spLocks noGrp="1"/>
+          </p:cNvSpPr>
+          <p:nvPr>
+            <p:ph idx="1"/>
+          </p:nvPr>
+        </p:nvSpPr>
+        <p:spPr/>
+        <p:txBody>
+          <a:bodyPr>
+            <a:normAutofit lnSpcReduction="10000"/>
+          </a:bodyPr>
+          <a:lstStyle/>
+          <a:p>
+            <a:pPr>
+              <a:buFont typeface="Wingdings" panose="05000000000000000000" pitchFamily="2" charset="2"/>
+              <a:buChar char="n"/>
+            </a:pPr>
+            <a:r>
+              <a:rPr lang="en-US" altLang="ja-JP" dirty="0"/>
+              <a:t>CRM</a:t>
+            </a:r>
+            <a:r>
+              <a:rPr lang="ja-JP" altLang="en-US" dirty="0"/>
+              <a:t>（</a:t>
+            </a:r>
+            <a:r>
+              <a:rPr lang="en-US" altLang="ja-JP" dirty="0"/>
+              <a:t>Customer Relational Management</a:t>
+            </a:r>
+            <a:r>
+              <a:rPr lang="ja-JP" altLang="en-US" dirty="0"/>
+              <a:t>）機能を搭載しており、必要な場面で</a:t>
+            </a:r>
+            <a:r>
+              <a:rPr lang="en-US" altLang="ja-JP" dirty="0"/>
+              <a:t>Web</a:t>
+            </a:r>
+            <a:r>
+              <a:rPr lang="ja-JP" altLang="en-US" dirty="0"/>
+              <a:t>フォームから予約された患者ごとの特徴（性格など）を残せるため、これを活用することで次回の対応時にこの情報を参考にしながら適切な対応方法を検討することができます。</a:t>
+            </a:r>
+            <a:endParaRPr lang="en-US" altLang="ja-JP" dirty="0"/>
+          </a:p>
+          <a:p>
+            <a:pPr>
+              <a:buFont typeface="Wingdings" panose="05000000000000000000" pitchFamily="2" charset="2"/>
+              <a:buChar char="n"/>
+            </a:pPr>
+            <a:r>
+              <a:rPr lang="en-US" altLang="ja-JP" dirty="0"/>
+              <a:t>Web</a:t>
+            </a:r>
+            <a:r>
+              <a:rPr lang="ja-JP" altLang="en-US" dirty="0"/>
+              <a:t>フォームから予約を行った患者については、次回からの</a:t>
+            </a:r>
+            <a:r>
+              <a:rPr lang="en-US" altLang="ja-JP" dirty="0"/>
+              <a:t>Web</a:t>
+            </a:r>
+            <a:r>
+              <a:rPr lang="ja-JP" altLang="en-US" dirty="0"/>
+              <a:t>フォームの必要事項の入力（住所や氏名など）を自動的に補完して患者の手間を減らします。</a:t>
+            </a:r>
+            <a:endParaRPr lang="en-US" altLang="ja-JP" dirty="0"/>
+          </a:p>
+          <a:p>
+            <a:pPr>
+              <a:buFont typeface="Wingdings" panose="05000000000000000000" pitchFamily="2" charset="2"/>
+              <a:buChar char="n"/>
+            </a:pPr>
+            <a:r>
+              <a:rPr lang="en-US" altLang="ja-JP" dirty="0"/>
+              <a:t>Web</a:t>
+            </a:r>
+            <a:r>
+              <a:rPr lang="ja-JP" altLang="en-US" dirty="0"/>
+              <a:t>フォーム上で表示されるメッセージを、各</a:t>
+            </a:r>
+            <a:r>
+              <a:rPr kumimoji="1" lang="ja-JP" altLang="en-US" dirty="0"/>
+              <a:t>診療科ごと、用件（初診</a:t>
+            </a:r>
+            <a:r>
+              <a:rPr kumimoji="1" lang="en-US" altLang="ja-JP" dirty="0"/>
+              <a:t>/</a:t>
+            </a:r>
+            <a:r>
+              <a:rPr kumimoji="1" lang="ja-JP" altLang="en-US" dirty="0"/>
+              <a:t>変更</a:t>
+            </a:r>
+            <a:r>
+              <a:rPr kumimoji="1" lang="en-US" altLang="ja-JP" dirty="0"/>
+              <a:t>/</a:t>
+            </a:r>
+            <a:r>
+              <a:rPr lang="ja-JP" altLang="en-US" dirty="0"/>
+              <a:t>取下）ごと</a:t>
+            </a:r>
+            <a:r>
+              <a:rPr kumimoji="1" lang="ja-JP" altLang="en-US" dirty="0"/>
+              <a:t>、医師ごとにカスタマイズできます。</a:t>
+            </a:r>
+            <a:endParaRPr kumimoji="1" lang="en-US" altLang="ja-JP" dirty="0"/>
+          </a:p>
+          <a:p>
+            <a:pPr>
+              <a:buFont typeface="Wingdings" panose="05000000000000000000" pitchFamily="2" charset="2"/>
+              <a:buChar char="n"/>
+            </a:pPr>
+            <a:r>
+              <a:rPr lang="ja-JP" altLang="en-US" dirty="0"/>
+              <a:t>患者がアクセス（参照）する</a:t>
+            </a:r>
+            <a:r>
+              <a:rPr lang="en-US" altLang="ja-JP" dirty="0"/>
+              <a:t>Web</a:t>
+            </a:r>
+            <a:r>
+              <a:rPr lang="ja-JP" altLang="en-US" dirty="0"/>
+              <a:t>フォーム画面をカスタマイズした場合に、公開する前にプレビューすることができます。</a:t>
+            </a:r>
+            <a:endParaRPr lang="en-US" altLang="ja-JP" dirty="0"/>
+          </a:p>
+          <a:p>
+            <a:pPr>
+              <a:buFont typeface="Wingdings" panose="05000000000000000000" pitchFamily="2" charset="2"/>
+              <a:buChar char="n"/>
+            </a:pPr>
+            <a:r>
+              <a:rPr lang="ja-JP" altLang="en-US" dirty="0"/>
+              <a:t>患者を担当しているスタッフが一時的に不在となった場合に別のスタッフがすばやく交代（継承）することができます。</a:t>
+            </a:r>
+            <a:endParaRPr lang="en-US" altLang="ja-JP" dirty="0"/>
+          </a:p>
+          <a:p>
+            <a:pPr>
+              <a:buFont typeface="Wingdings" panose="05000000000000000000" pitchFamily="2" charset="2"/>
+              <a:buChar char="n"/>
+            </a:pPr>
+            <a:r>
+              <a:rPr lang="ja-JP" altLang="en-US" dirty="0"/>
+              <a:t>依頼者への対応に関する経過状況を常に記録しており後からトレースすることができます。</a:t>
+            </a:r>
+            <a:endParaRPr lang="en-US" altLang="ja-JP" dirty="0"/>
+          </a:p>
+          <a:p>
+            <a:pPr>
+              <a:buFont typeface="Wingdings" panose="05000000000000000000" pitchFamily="2" charset="2"/>
+              <a:buChar char="n"/>
+            </a:pPr>
+            <a:r>
+              <a:rPr lang="ja-JP" altLang="en-US" dirty="0"/>
+              <a:t>本システムを使用するスタッフを複数</a:t>
+            </a:r>
+            <a:r>
+              <a:rPr kumimoji="1" lang="ja-JP" altLang="en-US" dirty="0"/>
+              <a:t>設定</a:t>
+            </a:r>
+            <a:r>
+              <a:rPr lang="ja-JP" altLang="en-US" dirty="0"/>
+              <a:t>した場合に、同一患者に対するスタッフ間の</a:t>
+            </a:r>
+            <a:r>
+              <a:rPr kumimoji="1" lang="ja-JP" altLang="en-US" dirty="0"/>
+              <a:t>誤操作防止機能が搭載されています。</a:t>
+            </a:r>
+            <a:endParaRPr kumimoji="1" lang="en-US" altLang="ja-JP" dirty="0"/>
+          </a:p>
+          <a:p>
+            <a:pPr>
+              <a:buFont typeface="Wingdings" panose="05000000000000000000" pitchFamily="2" charset="2"/>
+              <a:buChar char="n"/>
+            </a:pPr>
+            <a:r>
+              <a:rPr kumimoji="1" lang="ja-JP" altLang="en-US" dirty="0"/>
+              <a:t>一般メールソフトを併用する必要はありません。本システム内に外来予約管理に特化した専用のメール機能を搭載しており、メール</a:t>
+            </a:r>
+            <a:r>
+              <a:rPr lang="ja-JP" altLang="en-US" dirty="0"/>
+              <a:t>送信</a:t>
+            </a:r>
+            <a:r>
+              <a:rPr kumimoji="1" lang="ja-JP" altLang="en-US" dirty="0"/>
+              <a:t>時には現在の対応フェーズに応じて定型文から自動的にメッセージを組み立てて</a:t>
+            </a:r>
+            <a:r>
+              <a:rPr lang="ja-JP" altLang="en-US" dirty="0"/>
+              <a:t>ワンクリック</a:t>
+            </a:r>
+            <a:r>
+              <a:rPr kumimoji="1" lang="ja-JP" altLang="en-US" dirty="0"/>
+              <a:t>で送信できます（送信前に定型文を修正することもでき</a:t>
+            </a:r>
+            <a:r>
+              <a:rPr lang="ja-JP" altLang="en-US" dirty="0"/>
+              <a:t>ま</a:t>
+            </a:r>
+            <a:r>
+              <a:rPr kumimoji="1" lang="ja-JP" altLang="en-US" dirty="0"/>
+              <a:t>す）</a:t>
+            </a:r>
+            <a:endParaRPr kumimoji="1" lang="en-US" altLang="ja-JP" dirty="0"/>
+          </a:p>
+          <a:p>
+            <a:pPr>
+              <a:buFont typeface="Wingdings" panose="05000000000000000000" pitchFamily="2" charset="2"/>
+              <a:buChar char="n"/>
+            </a:pPr>
+            <a:r>
+              <a:rPr kumimoji="1" lang="ja-JP" altLang="en-US" dirty="0"/>
+              <a:t>患者へ送信したメールの既読状況を感知</a:t>
+            </a:r>
+            <a:r>
+              <a:rPr lang="ja-JP" altLang="en-US" dirty="0"/>
+              <a:t>します。メール送信前にスタッフが設定する閲覧</a:t>
+            </a:r>
+            <a:r>
+              <a:rPr kumimoji="1" lang="ja-JP" altLang="en-US" dirty="0"/>
+              <a:t>期限が切れた場合</a:t>
+            </a:r>
+            <a:r>
+              <a:rPr lang="ja-JP" altLang="en-US" dirty="0"/>
+              <a:t>には直ちに</a:t>
+            </a:r>
+            <a:r>
+              <a:rPr kumimoji="1" lang="ja-JP" altLang="en-US" dirty="0"/>
+              <a:t>スタッフの画面に反映され、</a:t>
+            </a:r>
+            <a:r>
+              <a:rPr lang="ja-JP" altLang="en-US" dirty="0"/>
+              <a:t>別の</a:t>
+            </a:r>
+            <a:r>
+              <a:rPr kumimoji="1" lang="ja-JP" altLang="en-US" dirty="0"/>
+              <a:t>対応方法（電話による架電対応等）に切り替えた運用がきます。</a:t>
+            </a:r>
+            <a:endParaRPr kumimoji="1" lang="en-US" altLang="ja-JP" dirty="0"/>
+          </a:p>
+          <a:p>
+            <a:endParaRPr kumimoji="1" lang="en-US" altLang="ja-JP" dirty="0"/>
+          </a:p>
+        </p:txBody>
+      </p:sp>
+    </p:spTree>
+    <p:extLst>
+      <p:ext uri="{BB962C8B-B14F-4D97-AF65-F5344CB8AC3E}">
+        <p14:creationId xmlns:p14="http://schemas.microsoft.com/office/powerpoint/2010/main" val="2738719903"/>
+      </p:ext>
+    </p:extLst>
+  </p:cSld>
+  <p:clrMapOvr>
+    <a:masterClrMapping/>
+  </p:clrMapOvr>
+</p:sld>
+</file>
+
+<file path=ppt/slides/slide30.xml><?xml version="1.0" encoding="utf-8"?>
 <p:sld xmlns:a="http://schemas.openxmlformats.org/drawingml/2006/main" xmlns:r="http://schemas.openxmlformats.org/officeDocument/2006/relationships" xmlns:p="http://schemas.openxmlformats.org/presentationml/2006/main">
   <p:cSld>
     <p:spTree>
@@ -4425,7 +6261,7 @@
 </p:sld>
 </file>
 
-<file path=ppt/slides/slide24.xml><?xml version="1.0" encoding="utf-8"?>
+<file path=ppt/slides/slide31.xml><?xml version="1.0" encoding="utf-8"?>
 <p:sld xmlns:a="http://schemas.openxmlformats.org/drawingml/2006/main" xmlns:r="http://schemas.openxmlformats.org/officeDocument/2006/relationships" xmlns:p="http://schemas.openxmlformats.org/presentationml/2006/main">
   <p:cSld>
     <p:spTree>
@@ -4522,7 +6358,7 @@
 </p:sld>
 </file>
 
-<file path=ppt/slides/slide25.xml><?xml version="1.0" encoding="utf-8"?>
+<file path=ppt/slides/slide32.xml><?xml version="1.0" encoding="utf-8"?>
 <p:sld xmlns:a="http://schemas.openxmlformats.org/drawingml/2006/main" xmlns:r="http://schemas.openxmlformats.org/officeDocument/2006/relationships" xmlns:p="http://schemas.openxmlformats.org/presentationml/2006/main">
   <p:cSld>
     <p:spTree>
@@ -4608,7 +6444,7 @@
 </p:sld>
 </file>
 
-<file path=ppt/slides/slide26.xml><?xml version="1.0" encoding="utf-8"?>
+<file path=ppt/slides/slide33.xml><?xml version="1.0" encoding="utf-8"?>
 <p:sld xmlns:a="http://schemas.openxmlformats.org/drawingml/2006/main" xmlns:r="http://schemas.openxmlformats.org/officeDocument/2006/relationships" xmlns:p="http://schemas.openxmlformats.org/presentationml/2006/main">
   <p:cSld>
     <p:spTree>
@@ -4715,7 +6551,7 @@
 </p:sld>
 </file>
 
-<file path=ppt/slides/slide27.xml><?xml version="1.0" encoding="utf-8"?>
+<file path=ppt/slides/slide34.xml><?xml version="1.0" encoding="utf-8"?>
 <p:sld xmlns:a="http://schemas.openxmlformats.org/drawingml/2006/main" xmlns:r="http://schemas.openxmlformats.org/officeDocument/2006/relationships" xmlns:p="http://schemas.openxmlformats.org/presentationml/2006/main">
   <p:cSld>
     <p:spTree>
@@ -4789,318 +6625,6 @@
     <p:extLst>
       <p:ext uri="{BB962C8B-B14F-4D97-AF65-F5344CB8AC3E}">
         <p14:creationId xmlns:p14="http://schemas.microsoft.com/office/powerpoint/2010/main" val="2693672561"/>
-      </p:ext>
-    </p:extLst>
-  </p:cSld>
-  <p:clrMapOvr>
-    <a:masterClrMapping/>
-  </p:clrMapOvr>
-</p:sld>
-</file>
-
-<file path=ppt/slides/slide3.xml><?xml version="1.0" encoding="utf-8"?>
-<p:sld xmlns:a="http://schemas.openxmlformats.org/drawingml/2006/main" xmlns:r="http://schemas.openxmlformats.org/officeDocument/2006/relationships" xmlns:p="http://schemas.openxmlformats.org/presentationml/2006/main">
-  <p:cSld>
-    <p:spTree>
-      <p:nvGrpSpPr>
-        <p:cNvPr id="1" name=""/>
-        <p:cNvGrpSpPr/>
-        <p:nvPr/>
-      </p:nvGrpSpPr>
-      <p:grpSpPr>
-        <a:xfrm>
-          <a:off x="0" y="0"/>
-          <a:ext cx="0" cy="0"/>
-          <a:chOff x="0" y="0"/>
-          <a:chExt cx="0" cy="0"/>
-        </a:xfrm>
-      </p:grpSpPr>
-      <p:sp>
-        <p:nvSpPr>
-          <p:cNvPr id="2" name="タイトル 1">
-            <a:extLst>
-              <a:ext uri="{FF2B5EF4-FFF2-40B4-BE49-F238E27FC236}">
-                <a16:creationId xmlns:a16="http://schemas.microsoft.com/office/drawing/2014/main" id="{BD2839F0-5B37-47A3-5903-6D1C8D41D4EA}"/>
-              </a:ext>
-            </a:extLst>
-          </p:cNvPr>
-          <p:cNvSpPr>
-            <a:spLocks noGrp="1"/>
-          </p:cNvSpPr>
-          <p:nvPr>
-            <p:ph type="title"/>
-          </p:nvPr>
-        </p:nvSpPr>
-        <p:spPr/>
-        <p:txBody>
-          <a:bodyPr/>
-          <a:lstStyle/>
-          <a:p>
-            <a:r>
-              <a:rPr kumimoji="1" lang="ja-JP" altLang="en-US" dirty="0"/>
-              <a:t>できること</a:t>
-            </a:r>
-          </a:p>
-        </p:txBody>
-      </p:sp>
-      <p:sp>
-        <p:nvSpPr>
-          <p:cNvPr id="3" name="コンテンツ プレースホルダー 2">
-            <a:extLst>
-              <a:ext uri="{FF2B5EF4-FFF2-40B4-BE49-F238E27FC236}">
-                <a16:creationId xmlns:a16="http://schemas.microsoft.com/office/drawing/2014/main" id="{BBC3F2BD-11EF-424C-EEC5-1708C48EA7DD}"/>
-              </a:ext>
-            </a:extLst>
-          </p:cNvPr>
-          <p:cNvSpPr>
-            <a:spLocks noGrp="1"/>
-          </p:cNvSpPr>
-          <p:nvPr>
-            <p:ph idx="1"/>
-          </p:nvPr>
-        </p:nvSpPr>
-        <p:spPr/>
-        <p:txBody>
-          <a:bodyPr>
-            <a:normAutofit lnSpcReduction="10000"/>
-          </a:bodyPr>
-          <a:lstStyle/>
-          <a:p>
-            <a:pPr>
-              <a:buFont typeface="Wingdings" panose="05000000000000000000" pitchFamily="2" charset="2"/>
-              <a:buChar char="n"/>
-            </a:pPr>
-            <a:r>
-              <a:rPr lang="en-US" altLang="ja-JP" dirty="0"/>
-              <a:t>CRM</a:t>
-            </a:r>
-            <a:r>
-              <a:rPr lang="ja-JP" altLang="en-US" dirty="0"/>
-              <a:t>（</a:t>
-            </a:r>
-            <a:r>
-              <a:rPr lang="en-US" altLang="ja-JP" dirty="0"/>
-              <a:t>Customer Relational Management</a:t>
-            </a:r>
-            <a:r>
-              <a:rPr lang="ja-JP" altLang="en-US" dirty="0"/>
-              <a:t>）機能を搭載しており、必要な場面で</a:t>
-            </a:r>
-            <a:r>
-              <a:rPr lang="en-US" altLang="ja-JP" dirty="0"/>
-              <a:t>Web</a:t>
-            </a:r>
-            <a:r>
-              <a:rPr lang="ja-JP" altLang="en-US" dirty="0"/>
-              <a:t>フォームから予約された患者ごとの特徴（性格など）を残せるため、これを活用することで次回の対応時にこの情報を参考にしながら適切な対応方法を検討することができます。</a:t>
-            </a:r>
-            <a:endParaRPr lang="en-US" altLang="ja-JP" dirty="0"/>
-          </a:p>
-          <a:p>
-            <a:pPr>
-              <a:buFont typeface="Wingdings" panose="05000000000000000000" pitchFamily="2" charset="2"/>
-              <a:buChar char="n"/>
-            </a:pPr>
-            <a:r>
-              <a:rPr lang="en-US" altLang="ja-JP" dirty="0"/>
-              <a:t>Web</a:t>
-            </a:r>
-            <a:r>
-              <a:rPr lang="ja-JP" altLang="en-US" dirty="0"/>
-              <a:t>フォームから予約を行った患者については、次回からの</a:t>
-            </a:r>
-            <a:r>
-              <a:rPr lang="en-US" altLang="ja-JP" dirty="0"/>
-              <a:t>Web</a:t>
-            </a:r>
-            <a:r>
-              <a:rPr lang="ja-JP" altLang="en-US" dirty="0"/>
-              <a:t>フォームの必要事項の入力（住所や氏名など）を自動的に補完して患者の手間を減らします。</a:t>
-            </a:r>
-            <a:endParaRPr lang="en-US" altLang="ja-JP" dirty="0"/>
-          </a:p>
-          <a:p>
-            <a:pPr>
-              <a:buFont typeface="Wingdings" panose="05000000000000000000" pitchFamily="2" charset="2"/>
-              <a:buChar char="n"/>
-            </a:pPr>
-            <a:r>
-              <a:rPr lang="en-US" altLang="ja-JP" dirty="0"/>
-              <a:t>Web</a:t>
-            </a:r>
-            <a:r>
-              <a:rPr lang="ja-JP" altLang="en-US" dirty="0"/>
-              <a:t>フォーム上で表示されるメッセージを、各</a:t>
-            </a:r>
-            <a:r>
-              <a:rPr kumimoji="1" lang="ja-JP" altLang="en-US" dirty="0"/>
-              <a:t>診療科ごと、用件（初診</a:t>
-            </a:r>
-            <a:r>
-              <a:rPr kumimoji="1" lang="en-US" altLang="ja-JP" dirty="0"/>
-              <a:t>/</a:t>
-            </a:r>
-            <a:r>
-              <a:rPr kumimoji="1" lang="ja-JP" altLang="en-US" dirty="0"/>
-              <a:t>変更</a:t>
-            </a:r>
-            <a:r>
-              <a:rPr kumimoji="1" lang="en-US" altLang="ja-JP" dirty="0"/>
-              <a:t>/</a:t>
-            </a:r>
-            <a:r>
-              <a:rPr lang="ja-JP" altLang="en-US" dirty="0"/>
-              <a:t>取下）ごと</a:t>
-            </a:r>
-            <a:r>
-              <a:rPr kumimoji="1" lang="ja-JP" altLang="en-US" dirty="0"/>
-              <a:t>、医師ごとにカスタマイズできます。</a:t>
-            </a:r>
-            <a:endParaRPr kumimoji="1" lang="en-US" altLang="ja-JP" dirty="0"/>
-          </a:p>
-          <a:p>
-            <a:pPr>
-              <a:buFont typeface="Wingdings" panose="05000000000000000000" pitchFamily="2" charset="2"/>
-              <a:buChar char="n"/>
-            </a:pPr>
-            <a:r>
-              <a:rPr lang="ja-JP" altLang="en-US" dirty="0"/>
-              <a:t>患者がアクセス（参照）する</a:t>
-            </a:r>
-            <a:r>
-              <a:rPr lang="en-US" altLang="ja-JP" dirty="0"/>
-              <a:t>Web</a:t>
-            </a:r>
-            <a:r>
-              <a:rPr lang="ja-JP" altLang="en-US" dirty="0"/>
-              <a:t>フォーム画面をカスタマイズした場合に、公開する前にプレビューすることができます。</a:t>
-            </a:r>
-            <a:endParaRPr lang="en-US" altLang="ja-JP" dirty="0"/>
-          </a:p>
-          <a:p>
-            <a:pPr>
-              <a:buFont typeface="Wingdings" panose="05000000000000000000" pitchFamily="2" charset="2"/>
-              <a:buChar char="n"/>
-            </a:pPr>
-            <a:r>
-              <a:rPr lang="ja-JP" altLang="en-US" dirty="0"/>
-              <a:t>患者を担当しているスタッフが一時的に不在となった場合に別のスタッフがすばやく交代（継承）することができます。</a:t>
-            </a:r>
-            <a:endParaRPr lang="en-US" altLang="ja-JP" dirty="0"/>
-          </a:p>
-          <a:p>
-            <a:pPr>
-              <a:buFont typeface="Wingdings" panose="05000000000000000000" pitchFamily="2" charset="2"/>
-              <a:buChar char="n"/>
-            </a:pPr>
-            <a:r>
-              <a:rPr lang="ja-JP" altLang="en-US" dirty="0"/>
-              <a:t>依頼者への対応に関する経過状況を常に記録しており後からトレースすることができます。</a:t>
-            </a:r>
-            <a:endParaRPr lang="en-US" altLang="ja-JP" dirty="0"/>
-          </a:p>
-          <a:p>
-            <a:pPr>
-              <a:buFont typeface="Wingdings" panose="05000000000000000000" pitchFamily="2" charset="2"/>
-              <a:buChar char="n"/>
-            </a:pPr>
-            <a:r>
-              <a:rPr lang="ja-JP" altLang="en-US" dirty="0"/>
-              <a:t>本システムを使用するスタッフを複数</a:t>
-            </a:r>
-            <a:r>
-              <a:rPr kumimoji="1" lang="ja-JP" altLang="en-US" dirty="0"/>
-              <a:t>設定</a:t>
-            </a:r>
-            <a:r>
-              <a:rPr lang="ja-JP" altLang="en-US" dirty="0"/>
-              <a:t>した場合に、同一患者に対するスタッフ間の</a:t>
-            </a:r>
-            <a:r>
-              <a:rPr kumimoji="1" lang="ja-JP" altLang="en-US" dirty="0"/>
-              <a:t>誤操作防止機能が搭載されています。</a:t>
-            </a:r>
-            <a:endParaRPr kumimoji="1" lang="en-US" altLang="ja-JP" dirty="0"/>
-          </a:p>
-          <a:p>
-            <a:pPr>
-              <a:buFont typeface="Wingdings" panose="05000000000000000000" pitchFamily="2" charset="2"/>
-              <a:buChar char="n"/>
-            </a:pPr>
-            <a:r>
-              <a:rPr kumimoji="1" lang="ja-JP" altLang="en-US" dirty="0"/>
-              <a:t>一般メールソフトを併用する必要はありません。本システム内に外来予約管理に特化した専用のメール機能を搭載しており、メール</a:t>
-            </a:r>
-            <a:r>
-              <a:rPr lang="ja-JP" altLang="en-US" dirty="0"/>
-              <a:t>送信</a:t>
-            </a:r>
-            <a:r>
-              <a:rPr kumimoji="1" lang="ja-JP" altLang="en-US" dirty="0"/>
-              <a:t>時には現在の対応フェーズに応じて定型文から自動的にメッセージを組み立てて</a:t>
-            </a:r>
-            <a:r>
-              <a:rPr lang="ja-JP" altLang="en-US" dirty="0"/>
-              <a:t>ワンクリック</a:t>
-            </a:r>
-            <a:r>
-              <a:rPr kumimoji="1" lang="ja-JP" altLang="en-US" dirty="0"/>
-              <a:t>で送信できます（送信前に定型文を修正することもでき</a:t>
-            </a:r>
-            <a:r>
-              <a:rPr lang="ja-JP" altLang="en-US" dirty="0"/>
-              <a:t>ま</a:t>
-            </a:r>
-            <a:r>
-              <a:rPr kumimoji="1" lang="ja-JP" altLang="en-US" dirty="0"/>
-              <a:t>す）</a:t>
-            </a:r>
-            <a:endParaRPr kumimoji="1" lang="en-US" altLang="ja-JP" dirty="0"/>
-          </a:p>
-          <a:p>
-            <a:pPr>
-              <a:buFont typeface="Wingdings" panose="05000000000000000000" pitchFamily="2" charset="2"/>
-              <a:buChar char="n"/>
-            </a:pPr>
-            <a:r>
-              <a:rPr kumimoji="1" lang="ja-JP" altLang="en-US" dirty="0"/>
-              <a:t>患者へ送信したメールの既読状況を感知</a:t>
-            </a:r>
-            <a:r>
-              <a:rPr lang="ja-JP" altLang="en-US" dirty="0"/>
-              <a:t>します。メール送信前にスタッフが設定する閲覧</a:t>
-            </a:r>
-            <a:r>
-              <a:rPr kumimoji="1" lang="ja-JP" altLang="en-US" dirty="0"/>
-              <a:t>期限が切れた場合</a:t>
-            </a:r>
-            <a:r>
-              <a:rPr lang="ja-JP" altLang="en-US" dirty="0"/>
-              <a:t>には直ちに</a:t>
-            </a:r>
-            <a:r>
-              <a:rPr kumimoji="1" lang="ja-JP" altLang="en-US" dirty="0"/>
-              <a:t>スタッフの画面に反映され、</a:t>
-            </a:r>
-            <a:r>
-              <a:rPr lang="ja-JP" altLang="en-US" dirty="0"/>
-              <a:t>別の</a:t>
-            </a:r>
-            <a:r>
-              <a:rPr kumimoji="1" lang="ja-JP" altLang="en-US" dirty="0"/>
-              <a:t>対応方法（電話による架電対応等）に切り替えた運用がきます。</a:t>
-            </a:r>
-            <a:endParaRPr kumimoji="1" lang="en-US" altLang="ja-JP" dirty="0"/>
-          </a:p>
-          <a:p>
-            <a:endParaRPr kumimoji="1" lang="en-US" altLang="ja-JP" dirty="0"/>
-          </a:p>
-        </p:txBody>
-      </p:sp>
-    </p:spTree>
-    <p:extLst>
-      <p:ext uri="{BB962C8B-B14F-4D97-AF65-F5344CB8AC3E}">
-        <p14:creationId xmlns:p14="http://schemas.microsoft.com/office/powerpoint/2010/main" val="2738719903"/>
       </p:ext>
     </p:extLst>
   </p:cSld>
